--- a/services/collective/assets/template.pptx
+++ b/services/collective/assets/template.pptx
@@ -11679,7 +11679,2474 @@
 </p:sld>
 </file>
 
-<file path=ppt/slides/slide10.xml><?xml version="1.0" encoding="utf-8"?>
+<file path=ppt/slides/slide2.xml><?xml version="1.0" encoding="utf-8"?>
+<p:sld xmlns:a="http://schemas.openxmlformats.org/drawingml/2006/main" xmlns:r="http://schemas.openxmlformats.org/officeDocument/2006/relationships" xmlns:p="http://schemas.openxmlformats.org/presentationml/2006/main">
+  <p:cSld>
+    <p:spTree>
+      <p:nvGrpSpPr>
+        <p:cNvPr id="1" name=""/>
+        <p:cNvGrpSpPr/>
+        <p:nvPr/>
+      </p:nvGrpSpPr>
+      <p:grpSpPr>
+        <a:xfrm>
+          <a:off x="0" y="0"/>
+          <a:ext cx="0" cy="0"/>
+          <a:chOff x="0" y="0"/>
+          <a:chExt cx="0" cy="0"/>
+        </a:xfrm>
+      </p:grpSpPr>
+      <p:sp>
+        <p:nvSpPr>
+          <p:cNvPr id="15" name="collective_brand_stripe">
+            <a:extLst>
+              <a:ext uri="{FF2B5EF4-FFF2-40B4-BE49-F238E27FC236}">
+                <a16:creationId xmlns:a16="http://schemas.microsoft.com/office/drawing/2014/main" xmlns="" id="{01205505-20CC-09AD-992B-7C58E9666887}"/>
+              </a:ext>
+            </a:extLst>
+          </p:cNvPr>
+          <p:cNvSpPr/>
+          <p:nvPr/>
+        </p:nvSpPr>
+        <p:spPr>
+          <a:xfrm rot="5400000">
+            <a:off x="8444019" y="3110020"/>
+            <a:ext cx="6860555" cy="635405"/>
+          </a:xfrm>
+          <a:prstGeom prst="roundRect">
+            <a:avLst>
+              <a:gd name="adj" fmla="val 0"/>
+            </a:avLst>
+          </a:prstGeom>
+          <a:gradFill>
+            <a:gsLst>
+              <a:gs pos="0">
+                <a:srgbClr val="1D6032"/>
+              </a:gs>
+              <a:gs pos="100000">
+                <a:srgbClr val="4CA33E"/>
+              </a:gs>
+            </a:gsLst>
+            <a:lin ang="2700000" scaled="0"/>
+          </a:gradFill>
+          <a:ln>
+            <a:noFill/>
+          </a:ln>
+        </p:spPr>
+        <p:txBody>
+          <a:bodyPr spcFirstLastPara="1" wrap="square" lIns="24683" tIns="12338" rIns="24683" bIns="12338" anchor="ctr" anchorCtr="0">
+            <a:noAutofit/>
+          </a:bodyPr>
+          <a:lstStyle/>
+          <a:p>
+            <a:pPr marL="108000" algn="l">
+              <a:buClr>
+                <a:srgbClr val="000000"/>
+              </a:buClr>
+              <a:buSzPts val="1800"/>
+            </a:pPr>
+            <a:endParaRPr lang="ru-RU" sz="2400" b="1" dirty="0">
+              <a:solidFill>
+                <a:schemeClr val="bg1"/>
+              </a:solidFill>
+              <a:latin typeface="Arial" panose="020B0604020202020204" pitchFamily="34" charset="0"/>
+              <a:ea typeface="Calibri"/>
+              <a:cs typeface="Arial" panose="020B0604020202020204" pitchFamily="34" charset="0"/>
+              <a:sym typeface="Calibri"/>
+            </a:endParaRPr>
+          </a:p>
+        </p:txBody>
+      </p:sp>
+      <p:sp>
+        <p:nvSpPr>
+          <p:cNvPr id="8" name="collective_page"/>
+          <p:cNvSpPr/>
+          <p:nvPr/>
+        </p:nvSpPr>
+        <p:spPr>
+          <a:xfrm>
+            <a:off x="11725258" y="6436422"/>
+            <a:ext cx="298480" cy="338554"/>
+          </a:xfrm>
+          <a:prstGeom prst="rect">
+            <a:avLst/>
+          </a:prstGeom>
+        </p:spPr>
+        <p:txBody>
+          <a:bodyPr wrap="none">
+            <a:spAutoFit/>
+          </a:bodyPr>
+          <a:lstStyle/>
+          <a:p/>
+        </p:txBody>
+      </p:sp>
+      <p:sp>
+        <p:nvSpPr>
+          <p:cNvPr id="9" name="collective_title">
+            <a:extLst>
+              <a:ext uri="{FF2B5EF4-FFF2-40B4-BE49-F238E27FC236}">
+                <a16:creationId xmlns:a16="http://schemas.microsoft.com/office/drawing/2014/main" xmlns="" id="{E7621DCE-AA24-5CC2-9B7A-2279E0409BFA}"/>
+              </a:ext>
+            </a:extLst>
+          </p:cNvPr>
+          <p:cNvSpPr/>
+          <p:nvPr/>
+        </p:nvSpPr>
+        <p:spPr>
+          <a:xfrm>
+            <a:off x="142301" y="132454"/>
+            <a:ext cx="11284155" cy="483429"/>
+          </a:xfrm>
+          <a:prstGeom prst="roundRect">
+            <a:avLst>
+              <a:gd name="adj" fmla="val 0"/>
+            </a:avLst>
+          </a:prstGeom>
+          <a:gradFill>
+            <a:gsLst>
+              <a:gs pos="0">
+                <a:srgbClr val="1D6032"/>
+              </a:gs>
+              <a:gs pos="100000">
+                <a:srgbClr val="4CA33E"/>
+              </a:gs>
+            </a:gsLst>
+            <a:lin ang="2700000" scaled="0"/>
+          </a:gradFill>
+          <a:ln>
+            <a:noFill/>
+          </a:ln>
+        </p:spPr>
+        <p:txBody>
+          <a:bodyPr spcFirstLastPara="1" wrap="square" lIns="24683" tIns="12339" rIns="24683" bIns="12339" anchor="ctr" anchorCtr="0">
+            <a:noAutofit/>
+          </a:bodyPr>
+          <a:lstStyle/>
+          <a:p>
+            <a:r>
+              <a:t>Коллективные обращения</a:t>
+            </a:r>
+          </a:p>
+        </p:txBody>
+      </p:sp>
+      <p:pic>
+        <p:nvPicPr>
+          <p:cNvPr id="11" name="Рисунок 10">
+            <a:extLst>
+              <a:ext uri="{FF2B5EF4-FFF2-40B4-BE49-F238E27FC236}">
+                <a16:creationId xmlns:a16="http://schemas.microsoft.com/office/drawing/2014/main" xmlns="" id="{C99A2A38-59F6-6169-1EBD-E833CF9D3EE5}"/>
+              </a:ext>
+            </a:extLst>
+          </p:cNvPr>
+          <p:cNvPicPr>
+            <a:picLocks noChangeAspect="1"/>
+          </p:cNvPicPr>
+          <p:nvPr/>
+        </p:nvPicPr>
+        <p:blipFill>
+          <a:blip r:embed="rId2" cstate="print">
+            <a:extLst>
+              <a:ext uri="{28A0092B-C50C-407E-A947-70E740481C1C}">
+                <a14:useLocalDpi xmlns:a14="http://schemas.microsoft.com/office/drawing/2010/main" val="0"/>
+              </a:ext>
+              <a:ext uri="{96DAC541-7B7A-43D3-8B79-37D633B846F1}">
+                <asvg:svgBlip xmlns:asvg="http://schemas.microsoft.com/office/drawing/2016/SVG/main" xmlns="" r:embed="rId3"/>
+              </a:ext>
+            </a:extLst>
+          </a:blip>
+          <a:stretch>
+            <a:fillRect/>
+          </a:stretch>
+        </p:blipFill>
+        <p:spPr>
+          <a:xfrm>
+            <a:off x="11676014" y="132450"/>
+            <a:ext cx="396564" cy="666750"/>
+          </a:xfrm>
+          <a:prstGeom prst="rect">
+            <a:avLst/>
+          </a:prstGeom>
+        </p:spPr>
+      </p:pic>
+      <p:graphicFrame>
+        <p:nvGraphicFramePr>
+          <p:cNvPr id="13" name="collective_totals"/>
+          <p:cNvGraphicFramePr>
+            <a:graphicFrameLocks noGrp="1"/>
+          </p:cNvGraphicFramePr>
+          <p:nvPr>
+            <p:extLst>
+              <p:ext uri="{D42A27DB-BD31-4B8C-83A1-F6EECF244321}">
+                <p14:modId xmlns:p14="http://schemas.microsoft.com/office/powerpoint/2010/main" val="1463491032"/>
+              </p:ext>
+            </p:extLst>
+          </p:nvPr>
+        </p:nvGraphicFramePr>
+        <p:xfrm>
+          <a:off x="142300" y="799200"/>
+          <a:ext cx="11284156" cy="2168358"/>
+        </p:xfrm>
+        <a:graphic>
+          <a:graphicData uri="http://schemas.openxmlformats.org/drawingml/2006/table">
+            <a:tbl>
+              <a:tblPr/>
+              <a:tblGrid>
+                <a:gridCol w="1574357">
+                  <a:extLst>
+                    <a:ext uri="{9D8B030D-6E8A-4147-A177-3AD203B41FA5}">
+                      <a16:colId xmlns:a16="http://schemas.microsoft.com/office/drawing/2014/main" xmlns="" val="1646718413"/>
+                    </a:ext>
+                  </a:extLst>
+                </a:gridCol>
+                <a:gridCol w="4649637">
+                  <a:extLst>
+                    <a:ext uri="{9D8B030D-6E8A-4147-A177-3AD203B41FA5}">
+                      <a16:colId xmlns:a16="http://schemas.microsoft.com/office/drawing/2014/main" xmlns="" val="792188316"/>
+                    </a:ext>
+                  </a:extLst>
+                </a:gridCol>
+                <a:gridCol w="2044461">
+                  <a:extLst>
+                    <a:ext uri="{9D8B030D-6E8A-4147-A177-3AD203B41FA5}">
+                      <a16:colId xmlns:a16="http://schemas.microsoft.com/office/drawing/2014/main" xmlns="" val="2077654746"/>
+                    </a:ext>
+                  </a:extLst>
+                </a:gridCol>
+                <a:gridCol w="3015701">
+                  <a:extLst>
+                    <a:ext uri="{9D8B030D-6E8A-4147-A177-3AD203B41FA5}">
+                      <a16:colId xmlns:a16="http://schemas.microsoft.com/office/drawing/2014/main" xmlns="" val="4173832101"/>
+                    </a:ext>
+                  </a:extLst>
+                </a:gridCol>
+              </a:tblGrid>
+              <a:tr h="622276">
+                <a:tc gridSpan="4">
+                  <a:txBody>
+                    <a:bodyPr/>
+                    <a:lstStyle/>
+                    <a:p/>
+                  </a:txBody>
+                  <a:tcPr marL="6371" marR="6371" marT="6371" marB="0" anchor="ctr">
+                    <a:lnL w="12700" cap="flat" cmpd="sng" algn="ctr">
+                      <a:solidFill>
+                        <a:schemeClr val="bg1"/>
+                      </a:solidFill>
+                      <a:prstDash val="solid"/>
+                      <a:round/>
+                      <a:headEnd type="none" w="med" len="med"/>
+                      <a:tailEnd type="none" w="med" len="med"/>
+                    </a:lnL>
+                    <a:lnR w="12700" cap="flat" cmpd="sng" algn="ctr">
+                      <a:solidFill>
+                        <a:schemeClr val="bg1"/>
+                      </a:solidFill>
+                      <a:prstDash val="solid"/>
+                      <a:round/>
+                      <a:headEnd type="none" w="med" len="med"/>
+                      <a:tailEnd type="none" w="med" len="med"/>
+                    </a:lnR>
+                    <a:lnT w="12700" cap="flat" cmpd="sng" algn="ctr">
+                      <a:solidFill>
+                        <a:schemeClr val="bg1"/>
+                      </a:solidFill>
+                      <a:prstDash val="solid"/>
+                      <a:round/>
+                      <a:headEnd type="none" w="med" len="med"/>
+                      <a:tailEnd type="none" w="med" len="med"/>
+                    </a:lnT>
+                    <a:lnB w="12700" cap="flat" cmpd="sng" algn="ctr">
+                      <a:noFill/>
+                      <a:prstDash val="solid"/>
+                      <a:round/>
+                      <a:headEnd type="none" w="med" len="med"/>
+                      <a:tailEnd type="none" w="med" len="med"/>
+                    </a:lnB>
+                    <a:lnTlToBr w="12700" cmpd="sng">
+                      <a:noFill/>
+                      <a:prstDash val="solid"/>
+                    </a:lnTlToBr>
+                    <a:lnBlToTr w="12700" cmpd="sng">
+                      <a:noFill/>
+                      <a:prstDash val="solid"/>
+                    </a:lnBlToTr>
+                    <a:solidFill>
+                      <a:srgbClr val="67BAE7"/>
+                    </a:solidFill>
+                  </a:tcPr>
+                </a:tc>
+                <a:tc hMerge="1">
+                  <a:txBody>
+                    <a:bodyPr/>
+                    <a:lstStyle/>
+                    <a:p/>
+                  </a:txBody>
+                  <a:tcPr marL="6371" marR="6371" marT="6371" marB="0" anchor="ctr">
+                    <a:lnL w="12700" cap="flat" cmpd="sng" algn="ctr">
+                      <a:solidFill>
+                        <a:schemeClr val="bg1"/>
+                      </a:solidFill>
+                      <a:prstDash val="solid"/>
+                      <a:round/>
+                      <a:headEnd type="none" w="med" len="med"/>
+                      <a:tailEnd type="none" w="med" len="med"/>
+                    </a:lnL>
+                    <a:lnR w="12700" cap="flat" cmpd="sng" algn="ctr">
+                      <a:solidFill>
+                        <a:schemeClr val="bg1"/>
+                      </a:solidFill>
+                      <a:prstDash val="solid"/>
+                      <a:round/>
+                      <a:headEnd type="none" w="med" len="med"/>
+                      <a:tailEnd type="none" w="med" len="med"/>
+                    </a:lnR>
+                    <a:lnT w="12700" cap="flat" cmpd="sng" algn="ctr">
+                      <a:solidFill>
+                        <a:schemeClr val="bg1"/>
+                      </a:solidFill>
+                      <a:prstDash val="solid"/>
+                      <a:round/>
+                      <a:headEnd type="none" w="med" len="med"/>
+                      <a:tailEnd type="none" w="med" len="med"/>
+                    </a:lnT>
+                    <a:lnB w="12700" cap="flat" cmpd="sng" algn="ctr">
+                      <a:solidFill>
+                        <a:schemeClr val="bg1"/>
+                      </a:solidFill>
+                      <a:prstDash val="solid"/>
+                      <a:round/>
+                      <a:headEnd type="none" w="med" len="med"/>
+                      <a:tailEnd type="none" w="med" len="med"/>
+                    </a:lnB>
+                    <a:lnTlToBr w="12700" cmpd="sng">
+                      <a:noFill/>
+                      <a:prstDash val="solid"/>
+                    </a:lnTlToBr>
+                    <a:lnBlToTr w="12700" cmpd="sng">
+                      <a:noFill/>
+                      <a:prstDash val="solid"/>
+                    </a:lnBlToTr>
+                    <a:solidFill>
+                      <a:srgbClr val="67BAE7"/>
+                    </a:solidFill>
+                  </a:tcPr>
+                </a:tc>
+                <a:tc hMerge="1">
+                  <a:txBody>
+                    <a:bodyPr/>
+                    <a:lstStyle/>
+                    <a:p/>
+                  </a:txBody>
+                  <a:tcPr marL="6371" marR="6371" marT="6371" marB="0" anchor="ctr">
+                    <a:lnL w="12700" cap="flat" cmpd="sng" algn="ctr">
+                      <a:solidFill>
+                        <a:schemeClr val="bg1"/>
+                      </a:solidFill>
+                      <a:prstDash val="solid"/>
+                      <a:round/>
+                      <a:headEnd type="none" w="med" len="med"/>
+                      <a:tailEnd type="none" w="med" len="med"/>
+                    </a:lnL>
+                    <a:lnR w="12700" cap="flat" cmpd="sng" algn="ctr">
+                      <a:solidFill>
+                        <a:schemeClr val="bg1"/>
+                      </a:solidFill>
+                      <a:prstDash val="solid"/>
+                      <a:round/>
+                      <a:headEnd type="none" w="med" len="med"/>
+                      <a:tailEnd type="none" w="med" len="med"/>
+                    </a:lnR>
+                    <a:lnT w="12700" cap="flat" cmpd="sng" algn="ctr">
+                      <a:solidFill>
+                        <a:schemeClr val="bg1"/>
+                      </a:solidFill>
+                      <a:prstDash val="solid"/>
+                      <a:round/>
+                      <a:headEnd type="none" w="med" len="med"/>
+                      <a:tailEnd type="none" w="med" len="med"/>
+                    </a:lnT>
+                    <a:lnB w="12700" cap="flat" cmpd="sng" algn="ctr">
+                      <a:solidFill>
+                        <a:schemeClr val="bg1"/>
+                      </a:solidFill>
+                      <a:prstDash val="solid"/>
+                      <a:round/>
+                      <a:headEnd type="none" w="med" len="med"/>
+                      <a:tailEnd type="none" w="med" len="med"/>
+                    </a:lnB>
+                    <a:lnTlToBr w="12700" cmpd="sng">
+                      <a:noFill/>
+                      <a:prstDash val="solid"/>
+                    </a:lnTlToBr>
+                    <a:lnBlToTr w="12700" cmpd="sng">
+                      <a:noFill/>
+                      <a:prstDash val="solid"/>
+                    </a:lnBlToTr>
+                    <a:solidFill>
+                      <a:srgbClr val="67BAE7"/>
+                    </a:solidFill>
+                  </a:tcPr>
+                </a:tc>
+                <a:tc hMerge="1">
+                  <a:txBody>
+                    <a:bodyPr/>
+                    <a:lstStyle/>
+                    <a:p/>
+                  </a:txBody>
+                  <a:tcPr marL="6371" marR="6371" marT="6371" marB="0" anchor="ctr">
+                    <a:lnL w="12700" cap="flat" cmpd="sng" algn="ctr">
+                      <a:solidFill>
+                        <a:schemeClr val="bg1"/>
+                      </a:solidFill>
+                      <a:prstDash val="solid"/>
+                      <a:round/>
+                      <a:headEnd type="none" w="med" len="med"/>
+                      <a:tailEnd type="none" w="med" len="med"/>
+                    </a:lnL>
+                    <a:lnR w="12700" cap="flat" cmpd="sng" algn="ctr">
+                      <a:solidFill>
+                        <a:schemeClr val="bg1"/>
+                      </a:solidFill>
+                      <a:prstDash val="solid"/>
+                      <a:round/>
+                      <a:headEnd type="none" w="med" len="med"/>
+                      <a:tailEnd type="none" w="med" len="med"/>
+                    </a:lnR>
+                    <a:lnT w="12700" cap="flat" cmpd="sng" algn="ctr">
+                      <a:solidFill>
+                        <a:schemeClr val="bg1"/>
+                      </a:solidFill>
+                      <a:prstDash val="solid"/>
+                      <a:round/>
+                      <a:headEnd type="none" w="med" len="med"/>
+                      <a:tailEnd type="none" w="med" len="med"/>
+                    </a:lnT>
+                    <a:lnB w="12700" cap="flat" cmpd="sng" algn="ctr">
+                      <a:solidFill>
+                        <a:schemeClr val="bg1"/>
+                      </a:solidFill>
+                      <a:prstDash val="solid"/>
+                      <a:round/>
+                      <a:headEnd type="none" w="med" len="med"/>
+                      <a:tailEnd type="none" w="med" len="med"/>
+                    </a:lnB>
+                    <a:lnTlToBr w="12700" cmpd="sng">
+                      <a:noFill/>
+                      <a:prstDash val="solid"/>
+                    </a:lnTlToBr>
+                    <a:lnBlToTr w="12700" cmpd="sng">
+                      <a:noFill/>
+                      <a:prstDash val="solid"/>
+                    </a:lnBlToTr>
+                    <a:solidFill>
+                      <a:srgbClr val="67BAE7"/>
+                    </a:solidFill>
+                  </a:tcPr>
+                </a:tc>
+                <a:extLst>
+                  <a:ext uri="{0D108BD9-81ED-4DB2-BD59-A6C34878D82A}">
+                    <a16:rowId xmlns:a16="http://schemas.microsoft.com/office/drawing/2014/main" xmlns="" val="2066328557"/>
+                  </a:ext>
+                </a:extLst>
+              </a:tr>
+              <a:tr h="544015">
+                <a:tc>
+                  <a:txBody>
+                    <a:bodyPr/>
+                    <a:lstStyle/>
+                    <a:p/>
+                  </a:txBody>
+                  <a:tcPr anchor="ctr">
+                    <a:lnL w="12700" cap="flat" cmpd="sng" algn="ctr">
+                      <a:noFill/>
+                      <a:prstDash val="solid"/>
+                      <a:round/>
+                      <a:headEnd type="none" w="med" len="med"/>
+                      <a:tailEnd type="none" w="med" len="med"/>
+                    </a:lnL>
+                    <a:lnR w="12700" cap="flat" cmpd="sng" algn="ctr">
+                      <a:solidFill>
+                        <a:srgbClr val="D7D7D7"/>
+                      </a:solidFill>
+                      <a:prstDash val="solid"/>
+                      <a:round/>
+                      <a:headEnd type="none" w="med" len="med"/>
+                      <a:tailEnd type="none" w="med" len="med"/>
+                    </a:lnR>
+                    <a:lnT w="12700" cap="flat" cmpd="sng" algn="ctr">
+                      <a:noFill/>
+                      <a:prstDash val="solid"/>
+                      <a:round/>
+                      <a:headEnd type="none" w="med" len="med"/>
+                      <a:tailEnd type="none" w="med" len="med"/>
+                    </a:lnT>
+                    <a:lnB w="12700" cap="flat" cmpd="sng" algn="ctr">
+                      <a:solidFill>
+                        <a:srgbClr val="D7D7D7"/>
+                      </a:solidFill>
+                      <a:prstDash val="solid"/>
+                      <a:round/>
+                      <a:headEnd type="none" w="med" len="med"/>
+                      <a:tailEnd type="none" w="med" len="med"/>
+                    </a:lnB>
+                    <a:lnTlToBr w="12700" cmpd="sng">
+                      <a:noFill/>
+                      <a:prstDash val="solid"/>
+                    </a:lnTlToBr>
+                    <a:lnBlToTr w="12700" cmpd="sng">
+                      <a:noFill/>
+                      <a:prstDash val="solid"/>
+                    </a:lnBlToTr>
+                    <a:solidFill>
+                      <a:schemeClr val="bg1"/>
+                    </a:solidFill>
+                  </a:tcPr>
+                </a:tc>
+                <a:tc>
+                  <a:txBody>
+                    <a:bodyPr/>
+                    <a:lstStyle/>
+                    <a:p/>
+                  </a:txBody>
+                  <a:tcPr anchor="ctr">
+                    <a:lnL w="12700" cap="flat" cmpd="sng" algn="ctr">
+                      <a:solidFill>
+                        <a:srgbClr val="D7D7D7"/>
+                      </a:solidFill>
+                      <a:prstDash val="solid"/>
+                      <a:round/>
+                      <a:headEnd type="none" w="med" len="med"/>
+                      <a:tailEnd type="none" w="med" len="med"/>
+                    </a:lnL>
+                    <a:lnR w="12700" cap="flat" cmpd="sng" algn="ctr">
+                      <a:solidFill>
+                        <a:srgbClr val="D7D7D7"/>
+                      </a:solidFill>
+                      <a:prstDash val="solid"/>
+                      <a:round/>
+                      <a:headEnd type="none" w="med" len="med"/>
+                      <a:tailEnd type="none" w="med" len="med"/>
+                    </a:lnR>
+                    <a:lnT w="12700" cap="flat" cmpd="sng" algn="ctr">
+                      <a:noFill/>
+                      <a:prstDash val="solid"/>
+                      <a:round/>
+                      <a:headEnd type="none" w="med" len="med"/>
+                      <a:tailEnd type="none" w="med" len="med"/>
+                    </a:lnT>
+                    <a:lnB w="12700" cap="flat" cmpd="sng" algn="ctr">
+                      <a:solidFill>
+                        <a:srgbClr val="D7D7D7"/>
+                      </a:solidFill>
+                      <a:prstDash val="solid"/>
+                      <a:round/>
+                      <a:headEnd type="none" w="med" len="med"/>
+                      <a:tailEnd type="none" w="med" len="med"/>
+                    </a:lnB>
+                    <a:lnTlToBr w="12700" cmpd="sng">
+                      <a:noFill/>
+                      <a:prstDash val="solid"/>
+                    </a:lnTlToBr>
+                    <a:lnBlToTr w="12700" cmpd="sng">
+                      <a:noFill/>
+                      <a:prstDash val="solid"/>
+                    </a:lnBlToTr>
+                    <a:solidFill>
+                      <a:schemeClr val="bg1"/>
+                    </a:solidFill>
+                  </a:tcPr>
+                </a:tc>
+                <a:tc>
+                  <a:txBody>
+                    <a:bodyPr/>
+                    <a:lstStyle/>
+                    <a:p/>
+                  </a:txBody>
+                  <a:tcPr anchor="ctr">
+                    <a:lnL w="12700" cap="flat" cmpd="sng" algn="ctr">
+                      <a:solidFill>
+                        <a:srgbClr val="D7D7D7"/>
+                      </a:solidFill>
+                      <a:prstDash val="solid"/>
+                      <a:round/>
+                      <a:headEnd type="none" w="med" len="med"/>
+                      <a:tailEnd type="none" w="med" len="med"/>
+                    </a:lnL>
+                    <a:lnR w="12700" cap="flat" cmpd="sng" algn="ctr">
+                      <a:solidFill>
+                        <a:srgbClr val="D7D7D7"/>
+                      </a:solidFill>
+                      <a:prstDash val="solid"/>
+                      <a:round/>
+                      <a:headEnd type="none" w="med" len="med"/>
+                      <a:tailEnd type="none" w="med" len="med"/>
+                    </a:lnR>
+                    <a:lnT w="12700" cap="flat" cmpd="sng" algn="ctr">
+                      <a:noFill/>
+                      <a:prstDash val="solid"/>
+                      <a:round/>
+                      <a:headEnd type="none" w="med" len="med"/>
+                      <a:tailEnd type="none" w="med" len="med"/>
+                    </a:lnT>
+                    <a:lnB w="12700" cap="flat" cmpd="sng" algn="ctr">
+                      <a:solidFill>
+                        <a:srgbClr val="D7D7D7"/>
+                      </a:solidFill>
+                      <a:prstDash val="solid"/>
+                      <a:round/>
+                      <a:headEnd type="none" w="med" len="med"/>
+                      <a:tailEnd type="none" w="med" len="med"/>
+                    </a:lnB>
+                    <a:lnTlToBr w="12700" cmpd="sng">
+                      <a:noFill/>
+                      <a:prstDash val="solid"/>
+                    </a:lnTlToBr>
+                    <a:lnBlToTr w="12700" cmpd="sng">
+                      <a:noFill/>
+                      <a:prstDash val="solid"/>
+                    </a:lnBlToTr>
+                    <a:solidFill>
+                      <a:schemeClr val="bg1"/>
+                    </a:solidFill>
+                  </a:tcPr>
+                </a:tc>
+                <a:tc>
+                  <a:txBody>
+                    <a:bodyPr/>
+                    <a:lstStyle/>
+                    <a:p/>
+                  </a:txBody>
+                  <a:tcPr anchor="ctr">
+                    <a:lnL w="12700" cap="flat" cmpd="sng" algn="ctr">
+                      <a:solidFill>
+                        <a:srgbClr val="D7D7D7"/>
+                      </a:solidFill>
+                      <a:prstDash val="solid"/>
+                      <a:round/>
+                      <a:headEnd type="none" w="med" len="med"/>
+                      <a:tailEnd type="none" w="med" len="med"/>
+                    </a:lnL>
+                    <a:lnR w="12700" cap="flat" cmpd="sng" algn="ctr">
+                      <a:noFill/>
+                      <a:prstDash val="solid"/>
+                      <a:round/>
+                      <a:headEnd type="none" w="med" len="med"/>
+                      <a:tailEnd type="none" w="med" len="med"/>
+                    </a:lnR>
+                    <a:lnT w="12700" cap="flat" cmpd="sng" algn="ctr">
+                      <a:noFill/>
+                      <a:prstDash val="solid"/>
+                      <a:round/>
+                      <a:headEnd type="none" w="med" len="med"/>
+                      <a:tailEnd type="none" w="med" len="med"/>
+                    </a:lnT>
+                    <a:lnB w="12700" cap="flat" cmpd="sng" algn="ctr">
+                      <a:solidFill>
+                        <a:srgbClr val="D7D7D7"/>
+                      </a:solidFill>
+                      <a:prstDash val="solid"/>
+                      <a:round/>
+                      <a:headEnd type="none" w="med" len="med"/>
+                      <a:tailEnd type="none" w="med" len="med"/>
+                    </a:lnB>
+                    <a:lnTlToBr w="12700" cmpd="sng">
+                      <a:noFill/>
+                      <a:prstDash val="solid"/>
+                    </a:lnTlToBr>
+                    <a:lnBlToTr w="12700" cmpd="sng">
+                      <a:noFill/>
+                      <a:prstDash val="solid"/>
+                    </a:lnBlToTr>
+                    <a:solidFill>
+                      <a:schemeClr val="bg1"/>
+                    </a:solidFill>
+                  </a:tcPr>
+                </a:tc>
+                <a:extLst>
+                  <a:ext uri="{0D108BD9-81ED-4DB2-BD59-A6C34878D82A}">
+                    <a16:rowId xmlns:a16="http://schemas.microsoft.com/office/drawing/2014/main" xmlns="" val="1507558984"/>
+                  </a:ext>
+                </a:extLst>
+              </a:tr>
+              <a:tr h="1002067">
+                <a:tc>
+                  <a:txBody>
+                    <a:bodyPr/>
+                    <a:lstStyle/>
+                    <a:p/>
+                  </a:txBody>
+                  <a:tcPr anchor="ctr">
+                    <a:lnL w="12700" cap="flat" cmpd="sng" algn="ctr">
+                      <a:noFill/>
+                      <a:prstDash val="solid"/>
+                      <a:round/>
+                      <a:headEnd type="none" w="med" len="med"/>
+                      <a:tailEnd type="none" w="med" len="med"/>
+                    </a:lnL>
+                    <a:lnR w="12700" cap="flat" cmpd="sng" algn="ctr">
+                      <a:solidFill>
+                        <a:srgbClr val="D7D7D7"/>
+                      </a:solidFill>
+                      <a:prstDash val="solid"/>
+                      <a:round/>
+                      <a:headEnd type="none" w="med" len="med"/>
+                      <a:tailEnd type="none" w="med" len="med"/>
+                    </a:lnR>
+                    <a:lnT w="12700" cap="flat" cmpd="sng" algn="ctr">
+                      <a:solidFill>
+                        <a:srgbClr val="D7D7D7"/>
+                      </a:solidFill>
+                      <a:prstDash val="solid"/>
+                      <a:round/>
+                      <a:headEnd type="none" w="med" len="med"/>
+                      <a:tailEnd type="none" w="med" len="med"/>
+                    </a:lnT>
+                    <a:lnB w="12700" cap="flat" cmpd="sng" algn="ctr">
+                      <a:noFill/>
+                      <a:prstDash val="solid"/>
+                      <a:round/>
+                      <a:headEnd type="none" w="med" len="med"/>
+                      <a:tailEnd type="none" w="med" len="med"/>
+                    </a:lnB>
+                    <a:lnTlToBr w="12700" cmpd="sng">
+                      <a:noFill/>
+                      <a:prstDash val="solid"/>
+                    </a:lnTlToBr>
+                    <a:lnBlToTr w="12700" cmpd="sng">
+                      <a:noFill/>
+                      <a:prstDash val="solid"/>
+                    </a:lnBlToTr>
+                    <a:solidFill>
+                      <a:schemeClr val="bg1"/>
+                    </a:solidFill>
+                  </a:tcPr>
+                </a:tc>
+                <a:tc>
+                  <a:txBody>
+                    <a:bodyPr/>
+                    <a:lstStyle/>
+                    <a:p/>
+                  </a:txBody>
+                  <a:tcPr anchor="ctr">
+                    <a:lnL w="12700" cap="flat" cmpd="sng" algn="ctr">
+                      <a:solidFill>
+                        <a:srgbClr val="D7D7D7"/>
+                      </a:solidFill>
+                      <a:prstDash val="solid"/>
+                      <a:round/>
+                      <a:headEnd type="none" w="med" len="med"/>
+                      <a:tailEnd type="none" w="med" len="med"/>
+                    </a:lnL>
+                    <a:lnR w="12700" cap="flat" cmpd="sng" algn="ctr">
+                      <a:solidFill>
+                        <a:srgbClr val="D7D7D7"/>
+                      </a:solidFill>
+                      <a:prstDash val="solid"/>
+                      <a:round/>
+                      <a:headEnd type="none" w="med" len="med"/>
+                      <a:tailEnd type="none" w="med" len="med"/>
+                    </a:lnR>
+                    <a:lnT w="12700" cap="flat" cmpd="sng" algn="ctr">
+                      <a:solidFill>
+                        <a:srgbClr val="D7D7D7"/>
+                      </a:solidFill>
+                      <a:prstDash val="solid"/>
+                      <a:round/>
+                      <a:headEnd type="none" w="med" len="med"/>
+                      <a:tailEnd type="none" w="med" len="med"/>
+                    </a:lnT>
+                    <a:lnB w="12700" cap="flat" cmpd="sng" algn="ctr">
+                      <a:noFill/>
+                      <a:prstDash val="solid"/>
+                      <a:round/>
+                      <a:headEnd type="none" w="med" len="med"/>
+                      <a:tailEnd type="none" w="med" len="med"/>
+                    </a:lnB>
+                    <a:lnTlToBr w="12700" cmpd="sng">
+                      <a:noFill/>
+                      <a:prstDash val="solid"/>
+                    </a:lnTlToBr>
+                    <a:lnBlToTr w="12700" cmpd="sng">
+                      <a:noFill/>
+                      <a:prstDash val="solid"/>
+                    </a:lnBlToTr>
+                    <a:solidFill>
+                      <a:schemeClr val="bg1"/>
+                    </a:solidFill>
+                  </a:tcPr>
+                </a:tc>
+                <a:tc>
+                  <a:txBody>
+                    <a:bodyPr/>
+                    <a:lstStyle/>
+                    <a:p/>
+                  </a:txBody>
+                  <a:tcPr anchor="ctr">
+                    <a:lnL w="12700" cap="flat" cmpd="sng" algn="ctr">
+                      <a:solidFill>
+                        <a:srgbClr val="D7D7D7"/>
+                      </a:solidFill>
+                      <a:prstDash val="solid"/>
+                      <a:round/>
+                      <a:headEnd type="none" w="med" len="med"/>
+                      <a:tailEnd type="none" w="med" len="med"/>
+                    </a:lnL>
+                    <a:lnR w="12700" cap="flat" cmpd="sng" algn="ctr">
+                      <a:solidFill>
+                        <a:srgbClr val="D7D7D7"/>
+                      </a:solidFill>
+                      <a:prstDash val="solid"/>
+                      <a:round/>
+                      <a:headEnd type="none" w="med" len="med"/>
+                      <a:tailEnd type="none" w="med" len="med"/>
+                    </a:lnR>
+                    <a:lnT w="12700" cap="flat" cmpd="sng" algn="ctr">
+                      <a:solidFill>
+                        <a:srgbClr val="D7D7D7"/>
+                      </a:solidFill>
+                      <a:prstDash val="solid"/>
+                      <a:round/>
+                      <a:headEnd type="none" w="med" len="med"/>
+                      <a:tailEnd type="none" w="med" len="med"/>
+                    </a:lnT>
+                    <a:lnB w="12700" cap="flat" cmpd="sng" algn="ctr">
+                      <a:noFill/>
+                      <a:prstDash val="solid"/>
+                      <a:round/>
+                      <a:headEnd type="none" w="med" len="med"/>
+                      <a:tailEnd type="none" w="med" len="med"/>
+                    </a:lnB>
+                    <a:lnTlToBr w="12700" cmpd="sng">
+                      <a:noFill/>
+                      <a:prstDash val="solid"/>
+                    </a:lnTlToBr>
+                    <a:lnBlToTr w="12700" cmpd="sng">
+                      <a:noFill/>
+                      <a:prstDash val="solid"/>
+                    </a:lnBlToTr>
+                    <a:solidFill>
+                      <a:schemeClr val="bg1"/>
+                    </a:solidFill>
+                  </a:tcPr>
+                </a:tc>
+                <a:tc>
+                  <a:txBody>
+                    <a:bodyPr/>
+                    <a:lstStyle/>
+                    <a:p/>
+                  </a:txBody>
+                  <a:tcPr anchor="ctr">
+                    <a:lnL w="12700" cap="flat" cmpd="sng" algn="ctr">
+                      <a:solidFill>
+                        <a:srgbClr val="D7D7D7"/>
+                      </a:solidFill>
+                      <a:prstDash val="solid"/>
+                      <a:round/>
+                      <a:headEnd type="none" w="med" len="med"/>
+                      <a:tailEnd type="none" w="med" len="med"/>
+                    </a:lnL>
+                    <a:lnR w="12700" cap="flat" cmpd="sng" algn="ctr">
+                      <a:noFill/>
+                      <a:prstDash val="solid"/>
+                      <a:round/>
+                      <a:headEnd type="none" w="med" len="med"/>
+                      <a:tailEnd type="none" w="med" len="med"/>
+                    </a:lnR>
+                    <a:lnT w="12700" cap="flat" cmpd="sng" algn="ctr">
+                      <a:solidFill>
+                        <a:srgbClr val="D7D7D7"/>
+                      </a:solidFill>
+                      <a:prstDash val="solid"/>
+                      <a:round/>
+                      <a:headEnd type="none" w="med" len="med"/>
+                      <a:tailEnd type="none" w="med" len="med"/>
+                    </a:lnT>
+                    <a:lnB w="12700" cap="flat" cmpd="sng" algn="ctr">
+                      <a:noFill/>
+                      <a:prstDash val="solid"/>
+                      <a:round/>
+                      <a:headEnd type="none" w="med" len="med"/>
+                      <a:tailEnd type="none" w="med" len="med"/>
+                    </a:lnB>
+                    <a:lnTlToBr w="12700" cmpd="sng">
+                      <a:noFill/>
+                      <a:prstDash val="solid"/>
+                    </a:lnTlToBr>
+                    <a:lnBlToTr w="12700" cmpd="sng">
+                      <a:noFill/>
+                      <a:prstDash val="solid"/>
+                    </a:lnBlToTr>
+                    <a:solidFill>
+                      <a:schemeClr val="bg1"/>
+                    </a:solidFill>
+                  </a:tcPr>
+                </a:tc>
+                <a:extLst>
+                  <a:ext uri="{0D108BD9-81ED-4DB2-BD59-A6C34878D82A}">
+                    <a16:rowId xmlns:a16="http://schemas.microsoft.com/office/drawing/2014/main" xmlns="" val="1883885399"/>
+                  </a:ext>
+                </a:extLst>
+              </a:tr>
+            </a:tbl>
+          </a:graphicData>
+        </a:graphic>
+      </p:graphicFrame>
+      <p:graphicFrame>
+        <p:nvGraphicFramePr>
+          <p:cNvPr id="14" name="collective_themes"/>
+          <p:cNvGraphicFramePr>
+            <a:graphicFrameLocks noGrp="1"/>
+          </p:cNvGraphicFramePr>
+          <p:nvPr>
+            <p:extLst>
+              <p:ext uri="{D42A27DB-BD31-4B8C-83A1-F6EECF244321}">
+                <p14:modId xmlns:p14="http://schemas.microsoft.com/office/powerpoint/2010/main" val="3313594587"/>
+              </p:ext>
+            </p:extLst>
+          </p:nvPr>
+        </p:nvGraphicFramePr>
+        <p:xfrm>
+          <a:off x="142300" y="2882819"/>
+          <a:ext cx="11284155" cy="3690975"/>
+        </p:xfrm>
+        <a:graphic>
+          <a:graphicData uri="http://schemas.openxmlformats.org/drawingml/2006/table">
+            <a:tbl>
+              <a:tblPr/>
+              <a:tblGrid>
+                <a:gridCol w="3761385">
+                  <a:extLst>
+                    <a:ext uri="{9D8B030D-6E8A-4147-A177-3AD203B41FA5}">
+                      <a16:colId xmlns:a16="http://schemas.microsoft.com/office/drawing/2014/main" xmlns="" val="1646718413"/>
+                    </a:ext>
+                  </a:extLst>
+                </a:gridCol>
+                <a:gridCol w="3761385">
+                  <a:extLst>
+                    <a:ext uri="{9D8B030D-6E8A-4147-A177-3AD203B41FA5}">
+                      <a16:colId xmlns:a16="http://schemas.microsoft.com/office/drawing/2014/main" xmlns="" val="792188316"/>
+                    </a:ext>
+                  </a:extLst>
+                </a:gridCol>
+                <a:gridCol w="3761385">
+                  <a:extLst>
+                    <a:ext uri="{9D8B030D-6E8A-4147-A177-3AD203B41FA5}">
+                      <a16:colId xmlns:a16="http://schemas.microsoft.com/office/drawing/2014/main" xmlns="" val="1891943241"/>
+                    </a:ext>
+                  </a:extLst>
+                </a:gridCol>
+              </a:tblGrid>
+              <a:tr h="900759">
+                <a:tc gridSpan="3">
+                  <a:txBody>
+                    <a:bodyPr/>
+                    <a:lstStyle/>
+                    <a:p/>
+                  </a:txBody>
+                  <a:tcPr marL="6371" marR="6371" marT="6371" marB="0" anchor="ctr">
+                    <a:lnL w="12700" cap="flat" cmpd="sng" algn="ctr">
+                      <a:solidFill>
+                        <a:schemeClr val="bg1"/>
+                      </a:solidFill>
+                      <a:prstDash val="solid"/>
+                      <a:round/>
+                      <a:headEnd type="none" w="med" len="med"/>
+                      <a:tailEnd type="none" w="med" len="med"/>
+                    </a:lnL>
+                    <a:lnR w="12700" cap="flat" cmpd="sng" algn="ctr">
+                      <a:solidFill>
+                        <a:schemeClr val="bg1"/>
+                      </a:solidFill>
+                      <a:prstDash val="solid"/>
+                      <a:round/>
+                      <a:headEnd type="none" w="med" len="med"/>
+                      <a:tailEnd type="none" w="med" len="med"/>
+                    </a:lnR>
+                    <a:lnT w="12700" cap="flat" cmpd="sng" algn="ctr">
+                      <a:solidFill>
+                        <a:schemeClr val="bg1"/>
+                      </a:solidFill>
+                      <a:prstDash val="solid"/>
+                      <a:round/>
+                      <a:headEnd type="none" w="med" len="med"/>
+                      <a:tailEnd type="none" w="med" len="med"/>
+                    </a:lnT>
+                    <a:lnB w="12700" cap="flat" cmpd="sng" algn="ctr">
+                      <a:noFill/>
+                      <a:prstDash val="solid"/>
+                      <a:round/>
+                      <a:headEnd type="none" w="med" len="med"/>
+                      <a:tailEnd type="none" w="med" len="med"/>
+                    </a:lnB>
+                    <a:lnTlToBr w="12700" cmpd="sng">
+                      <a:noFill/>
+                      <a:prstDash val="solid"/>
+                    </a:lnTlToBr>
+                    <a:lnBlToTr w="12700" cmpd="sng">
+                      <a:noFill/>
+                      <a:prstDash val="solid"/>
+                    </a:lnBlToTr>
+                    <a:solidFill>
+                      <a:srgbClr val="67BAE7"/>
+                    </a:solidFill>
+                  </a:tcPr>
+                </a:tc>
+                <a:tc hMerge="1">
+                  <a:txBody>
+                    <a:bodyPr/>
+                    <a:lstStyle/>
+                    <a:p/>
+                  </a:txBody>
+                  <a:tcPr marL="6371" marR="6371" marT="6371" marB="0" anchor="ctr">
+                    <a:lnL w="12700" cap="flat" cmpd="sng" algn="ctr">
+                      <a:solidFill>
+                        <a:schemeClr val="bg1"/>
+                      </a:solidFill>
+                      <a:prstDash val="solid"/>
+                      <a:round/>
+                      <a:headEnd type="none" w="med" len="med"/>
+                      <a:tailEnd type="none" w="med" len="med"/>
+                    </a:lnL>
+                    <a:lnR w="12700" cap="flat" cmpd="sng" algn="ctr">
+                      <a:solidFill>
+                        <a:schemeClr val="bg1"/>
+                      </a:solidFill>
+                      <a:prstDash val="solid"/>
+                      <a:round/>
+                      <a:headEnd type="none" w="med" len="med"/>
+                      <a:tailEnd type="none" w="med" len="med"/>
+                    </a:lnR>
+                    <a:lnT w="12700" cap="flat" cmpd="sng" algn="ctr">
+                      <a:solidFill>
+                        <a:schemeClr val="bg1"/>
+                      </a:solidFill>
+                      <a:prstDash val="solid"/>
+                      <a:round/>
+                      <a:headEnd type="none" w="med" len="med"/>
+                      <a:tailEnd type="none" w="med" len="med"/>
+                    </a:lnT>
+                    <a:lnB w="12700" cap="flat" cmpd="sng" algn="ctr">
+                      <a:solidFill>
+                        <a:schemeClr val="bg1"/>
+                      </a:solidFill>
+                      <a:prstDash val="solid"/>
+                      <a:round/>
+                      <a:headEnd type="none" w="med" len="med"/>
+                      <a:tailEnd type="none" w="med" len="med"/>
+                    </a:lnB>
+                    <a:lnTlToBr w="12700" cmpd="sng">
+                      <a:noFill/>
+                      <a:prstDash val="solid"/>
+                    </a:lnTlToBr>
+                    <a:lnBlToTr w="12700" cmpd="sng">
+                      <a:noFill/>
+                      <a:prstDash val="solid"/>
+                    </a:lnBlToTr>
+                    <a:solidFill>
+                      <a:srgbClr val="67BAE7"/>
+                    </a:solidFill>
+                  </a:tcPr>
+                </a:tc>
+                <a:tc hMerge="1">
+                  <a:txBody>
+                    <a:bodyPr/>
+                    <a:lstStyle/>
+                    <a:p/>
+                  </a:txBody>
+                  <a:tcPr marL="6371" marR="6371" marT="6371" marB="0" anchor="ctr">
+                    <a:lnL w="12700" cap="flat" cmpd="sng" algn="ctr">
+                      <a:solidFill>
+                        <a:schemeClr val="bg1"/>
+                      </a:solidFill>
+                      <a:prstDash val="solid"/>
+                      <a:round/>
+                      <a:headEnd type="none" w="med" len="med"/>
+                      <a:tailEnd type="none" w="med" len="med"/>
+                    </a:lnL>
+                    <a:lnR w="12700" cap="flat" cmpd="sng" algn="ctr">
+                      <a:solidFill>
+                        <a:schemeClr val="bg1"/>
+                      </a:solidFill>
+                      <a:prstDash val="solid"/>
+                      <a:round/>
+                      <a:headEnd type="none" w="med" len="med"/>
+                      <a:tailEnd type="none" w="med" len="med"/>
+                    </a:lnR>
+                    <a:lnT w="12700" cap="flat" cmpd="sng" algn="ctr">
+                      <a:solidFill>
+                        <a:schemeClr val="bg1"/>
+                      </a:solidFill>
+                      <a:prstDash val="solid"/>
+                      <a:round/>
+                      <a:headEnd type="none" w="med" len="med"/>
+                      <a:tailEnd type="none" w="med" len="med"/>
+                    </a:lnT>
+                    <a:lnB w="12700" cap="flat" cmpd="sng" algn="ctr">
+                      <a:solidFill>
+                        <a:schemeClr val="bg1"/>
+                      </a:solidFill>
+                      <a:prstDash val="solid"/>
+                      <a:round/>
+                      <a:headEnd type="none" w="med" len="med"/>
+                      <a:tailEnd type="none" w="med" len="med"/>
+                    </a:lnB>
+                    <a:lnTlToBr w="12700" cmpd="sng">
+                      <a:noFill/>
+                      <a:prstDash val="solid"/>
+                    </a:lnTlToBr>
+                    <a:lnBlToTr w="12700" cmpd="sng">
+                      <a:noFill/>
+                      <a:prstDash val="solid"/>
+                    </a:lnBlToTr>
+                    <a:solidFill>
+                      <a:srgbClr val="67BAE7"/>
+                    </a:solidFill>
+                  </a:tcPr>
+                </a:tc>
+                <a:extLst>
+                  <a:ext uri="{0D108BD9-81ED-4DB2-BD59-A6C34878D82A}">
+                    <a16:rowId xmlns:a16="http://schemas.microsoft.com/office/drawing/2014/main" xmlns="" val="2066328557"/>
+                  </a:ext>
+                </a:extLst>
+              </a:tr>
+              <a:tr h="930072">
+                <a:tc>
+                  <a:txBody>
+                    <a:bodyPr/>
+                    <a:lstStyle/>
+                    <a:p/>
+                  </a:txBody>
+                  <a:tcPr anchor="ctr">
+                    <a:lnL w="12700" cap="flat" cmpd="sng" algn="ctr">
+                      <a:noFill/>
+                      <a:prstDash val="solid"/>
+                      <a:round/>
+                      <a:headEnd type="none" w="med" len="med"/>
+                      <a:tailEnd type="none" w="med" len="med"/>
+                    </a:lnL>
+                    <a:lnR w="12700" cap="flat" cmpd="sng" algn="ctr">
+                      <a:solidFill>
+                        <a:srgbClr val="D7D7D7"/>
+                      </a:solidFill>
+                      <a:prstDash val="solid"/>
+                      <a:round/>
+                      <a:headEnd type="none" w="med" len="med"/>
+                      <a:tailEnd type="none" w="med" len="med"/>
+                    </a:lnR>
+                    <a:lnT w="12700" cap="flat" cmpd="sng" algn="ctr">
+                      <a:noFill/>
+                      <a:prstDash val="solid"/>
+                      <a:round/>
+                      <a:headEnd type="none" w="med" len="med"/>
+                      <a:tailEnd type="none" w="med" len="med"/>
+                    </a:lnT>
+                    <a:lnB w="12700" cap="flat" cmpd="sng" algn="ctr">
+                      <a:solidFill>
+                        <a:srgbClr val="D7D7D7"/>
+                      </a:solidFill>
+                      <a:prstDash val="solid"/>
+                      <a:round/>
+                      <a:headEnd type="none" w="med" len="med"/>
+                      <a:tailEnd type="none" w="med" len="med"/>
+                    </a:lnB>
+                    <a:lnTlToBr w="12700" cmpd="sng">
+                      <a:noFill/>
+                      <a:prstDash val="solid"/>
+                    </a:lnTlToBr>
+                    <a:lnBlToTr w="12700" cmpd="sng">
+                      <a:noFill/>
+                      <a:prstDash val="solid"/>
+                    </a:lnBlToTr>
+                    <a:solidFill>
+                      <a:schemeClr val="bg1"/>
+                    </a:solidFill>
+                  </a:tcPr>
+                </a:tc>
+                <a:tc>
+                  <a:txBody>
+                    <a:bodyPr/>
+                    <a:lstStyle/>
+                    <a:p/>
+                  </a:txBody>
+                  <a:tcPr anchor="ctr">
+                    <a:lnL w="12700" cap="flat" cmpd="sng" algn="ctr">
+                      <a:solidFill>
+                        <a:srgbClr val="D7D7D7"/>
+                      </a:solidFill>
+                      <a:prstDash val="solid"/>
+                      <a:round/>
+                      <a:headEnd type="none" w="med" len="med"/>
+                      <a:tailEnd type="none" w="med" len="med"/>
+                    </a:lnL>
+                    <a:lnR w="12700" cap="flat" cmpd="sng" algn="ctr">
+                      <a:solidFill>
+                        <a:srgbClr val="D7D7D7"/>
+                      </a:solidFill>
+                      <a:prstDash val="solid"/>
+                      <a:round/>
+                      <a:headEnd type="none" w="med" len="med"/>
+                      <a:tailEnd type="none" w="med" len="med"/>
+                    </a:lnR>
+                    <a:lnT w="12700" cap="flat" cmpd="sng" algn="ctr">
+                      <a:noFill/>
+                      <a:prstDash val="solid"/>
+                      <a:round/>
+                      <a:headEnd type="none" w="med" len="med"/>
+                      <a:tailEnd type="none" w="med" len="med"/>
+                    </a:lnT>
+                    <a:lnB w="12700" cap="flat" cmpd="sng" algn="ctr">
+                      <a:solidFill>
+                        <a:srgbClr val="D7D7D7"/>
+                      </a:solidFill>
+                      <a:prstDash val="solid"/>
+                      <a:round/>
+                      <a:headEnd type="none" w="med" len="med"/>
+                      <a:tailEnd type="none" w="med" len="med"/>
+                    </a:lnB>
+                    <a:lnTlToBr w="12700" cmpd="sng">
+                      <a:noFill/>
+                      <a:prstDash val="solid"/>
+                    </a:lnTlToBr>
+                    <a:lnBlToTr w="12700" cmpd="sng">
+                      <a:noFill/>
+                      <a:prstDash val="solid"/>
+                    </a:lnBlToTr>
+                    <a:solidFill>
+                      <a:schemeClr val="bg1"/>
+                    </a:solidFill>
+                  </a:tcPr>
+                </a:tc>
+                <a:tc>
+                  <a:txBody>
+                    <a:bodyPr/>
+                    <a:lstStyle/>
+                    <a:p/>
+                  </a:txBody>
+                  <a:tcPr anchor="ctr">
+                    <a:lnL w="12700" cap="flat" cmpd="sng" algn="ctr">
+                      <a:solidFill>
+                        <a:srgbClr val="D7D7D7"/>
+                      </a:solidFill>
+                      <a:prstDash val="solid"/>
+                      <a:round/>
+                      <a:headEnd type="none" w="med" len="med"/>
+                      <a:tailEnd type="none" w="med" len="med"/>
+                    </a:lnL>
+                    <a:lnR w="12700" cap="flat" cmpd="sng" algn="ctr">
+                      <a:noFill/>
+                      <a:prstDash val="solid"/>
+                      <a:round/>
+                      <a:headEnd type="none" w="med" len="med"/>
+                      <a:tailEnd type="none" w="med" len="med"/>
+                    </a:lnR>
+                    <a:lnT w="12700" cap="flat" cmpd="sng" algn="ctr">
+                      <a:noFill/>
+                      <a:prstDash val="solid"/>
+                      <a:round/>
+                      <a:headEnd type="none" w="med" len="med"/>
+                      <a:tailEnd type="none" w="med" len="med"/>
+                    </a:lnT>
+                    <a:lnB w="12700" cap="flat" cmpd="sng" algn="ctr">
+                      <a:solidFill>
+                        <a:srgbClr val="D7D7D7"/>
+                      </a:solidFill>
+                      <a:prstDash val="solid"/>
+                      <a:round/>
+                      <a:headEnd type="none" w="med" len="med"/>
+                      <a:tailEnd type="none" w="med" len="med"/>
+                    </a:lnB>
+                    <a:lnTlToBr w="12700" cmpd="sng">
+                      <a:noFill/>
+                      <a:prstDash val="solid"/>
+                    </a:lnTlToBr>
+                    <a:lnBlToTr w="12700" cmpd="sng">
+                      <a:noFill/>
+                      <a:prstDash val="solid"/>
+                    </a:lnBlToTr>
+                    <a:solidFill>
+                      <a:schemeClr val="bg1"/>
+                    </a:solidFill>
+                  </a:tcPr>
+                </a:tc>
+                <a:extLst>
+                  <a:ext uri="{0D108BD9-81ED-4DB2-BD59-A6C34878D82A}">
+                    <a16:rowId xmlns:a16="http://schemas.microsoft.com/office/drawing/2014/main" xmlns="" val="1507558984"/>
+                  </a:ext>
+                </a:extLst>
+              </a:tr>
+              <a:tr h="930072">
+                <a:tc>
+                  <a:txBody>
+                    <a:bodyPr/>
+                    <a:lstStyle/>
+                    <a:p/>
+                  </a:txBody>
+                  <a:tcPr anchor="ctr">
+                    <a:lnL w="12700" cap="flat" cmpd="sng" algn="ctr">
+                      <a:noFill/>
+                      <a:prstDash val="solid"/>
+                      <a:round/>
+                      <a:headEnd type="none" w="med" len="med"/>
+                      <a:tailEnd type="none" w="med" len="med"/>
+                    </a:lnL>
+                    <a:lnR w="12700" cap="flat" cmpd="sng" algn="ctr">
+                      <a:solidFill>
+                        <a:srgbClr val="D7D7D7"/>
+                      </a:solidFill>
+                      <a:prstDash val="solid"/>
+                      <a:round/>
+                      <a:headEnd type="none" w="med" len="med"/>
+                      <a:tailEnd type="none" w="med" len="med"/>
+                    </a:lnR>
+                    <a:lnT w="12700" cap="flat" cmpd="sng" algn="ctr">
+                      <a:solidFill>
+                        <a:srgbClr val="D7D7D7"/>
+                      </a:solidFill>
+                      <a:prstDash val="solid"/>
+                      <a:round/>
+                      <a:headEnd type="none" w="med" len="med"/>
+                      <a:tailEnd type="none" w="med" len="med"/>
+                    </a:lnT>
+                    <a:lnB w="12700" cap="flat" cmpd="sng" algn="ctr">
+                      <a:solidFill>
+                        <a:srgbClr val="D7D7D7"/>
+                      </a:solidFill>
+                      <a:prstDash val="solid"/>
+                      <a:round/>
+                      <a:headEnd type="none" w="med" len="med"/>
+                      <a:tailEnd type="none" w="med" len="med"/>
+                    </a:lnB>
+                    <a:lnTlToBr w="12700" cmpd="sng">
+                      <a:noFill/>
+                      <a:prstDash val="solid"/>
+                    </a:lnTlToBr>
+                    <a:lnBlToTr w="12700" cmpd="sng">
+                      <a:noFill/>
+                      <a:prstDash val="solid"/>
+                    </a:lnBlToTr>
+                    <a:solidFill>
+                      <a:schemeClr val="bg1"/>
+                    </a:solidFill>
+                  </a:tcPr>
+                </a:tc>
+                <a:tc>
+                  <a:txBody>
+                    <a:bodyPr/>
+                    <a:lstStyle/>
+                    <a:p/>
+                  </a:txBody>
+                  <a:tcPr anchor="ctr">
+                    <a:lnL w="12700" cap="flat" cmpd="sng" algn="ctr">
+                      <a:solidFill>
+                        <a:srgbClr val="D7D7D7"/>
+                      </a:solidFill>
+                      <a:prstDash val="solid"/>
+                      <a:round/>
+                      <a:headEnd type="none" w="med" len="med"/>
+                      <a:tailEnd type="none" w="med" len="med"/>
+                    </a:lnL>
+                    <a:lnR w="12700" cap="flat" cmpd="sng" algn="ctr">
+                      <a:solidFill>
+                        <a:srgbClr val="D7D7D7"/>
+                      </a:solidFill>
+                      <a:prstDash val="solid"/>
+                      <a:round/>
+                      <a:headEnd type="none" w="med" len="med"/>
+                      <a:tailEnd type="none" w="med" len="med"/>
+                    </a:lnR>
+                    <a:lnT w="12700" cap="flat" cmpd="sng" algn="ctr">
+                      <a:solidFill>
+                        <a:srgbClr val="D7D7D7"/>
+                      </a:solidFill>
+                      <a:prstDash val="solid"/>
+                      <a:round/>
+                      <a:headEnd type="none" w="med" len="med"/>
+                      <a:tailEnd type="none" w="med" len="med"/>
+                    </a:lnT>
+                    <a:lnB w="12700" cap="flat" cmpd="sng" algn="ctr">
+                      <a:solidFill>
+                        <a:srgbClr val="D7D7D7"/>
+                      </a:solidFill>
+                      <a:prstDash val="solid"/>
+                      <a:round/>
+                      <a:headEnd type="none" w="med" len="med"/>
+                      <a:tailEnd type="none" w="med" len="med"/>
+                    </a:lnB>
+                    <a:lnTlToBr w="12700" cmpd="sng">
+                      <a:noFill/>
+                      <a:prstDash val="solid"/>
+                    </a:lnTlToBr>
+                    <a:lnBlToTr w="12700" cmpd="sng">
+                      <a:noFill/>
+                      <a:prstDash val="solid"/>
+                    </a:lnBlToTr>
+                    <a:solidFill>
+                      <a:schemeClr val="bg1"/>
+                    </a:solidFill>
+                  </a:tcPr>
+                </a:tc>
+                <a:tc>
+                  <a:txBody>
+                    <a:bodyPr/>
+                    <a:lstStyle/>
+                    <a:p/>
+                  </a:txBody>
+                  <a:tcPr anchor="ctr">
+                    <a:lnL w="12700" cap="flat" cmpd="sng" algn="ctr">
+                      <a:solidFill>
+                        <a:srgbClr val="D7D7D7"/>
+                      </a:solidFill>
+                      <a:prstDash val="solid"/>
+                      <a:round/>
+                      <a:headEnd type="none" w="med" len="med"/>
+                      <a:tailEnd type="none" w="med" len="med"/>
+                    </a:lnL>
+                    <a:lnR w="12700" cap="flat" cmpd="sng" algn="ctr">
+                      <a:noFill/>
+                      <a:prstDash val="solid"/>
+                      <a:round/>
+                      <a:headEnd type="none" w="med" len="med"/>
+                      <a:tailEnd type="none" w="med" len="med"/>
+                    </a:lnR>
+                    <a:lnT w="12700" cap="flat" cmpd="sng" algn="ctr">
+                      <a:solidFill>
+                        <a:srgbClr val="D7D7D7"/>
+                      </a:solidFill>
+                      <a:prstDash val="solid"/>
+                      <a:round/>
+                      <a:headEnd type="none" w="med" len="med"/>
+                      <a:tailEnd type="none" w="med" len="med"/>
+                    </a:lnT>
+                    <a:lnB w="12700" cap="flat" cmpd="sng" algn="ctr">
+                      <a:solidFill>
+                        <a:srgbClr val="D7D7D7"/>
+                      </a:solidFill>
+                      <a:prstDash val="solid"/>
+                      <a:round/>
+                      <a:headEnd type="none" w="med" len="med"/>
+                      <a:tailEnd type="none" w="med" len="med"/>
+                    </a:lnB>
+                    <a:lnTlToBr w="12700" cmpd="sng">
+                      <a:noFill/>
+                      <a:prstDash val="solid"/>
+                    </a:lnTlToBr>
+                    <a:lnBlToTr w="12700" cmpd="sng">
+                      <a:noFill/>
+                      <a:prstDash val="solid"/>
+                    </a:lnBlToTr>
+                    <a:solidFill>
+                      <a:schemeClr val="bg1"/>
+                    </a:solidFill>
+                  </a:tcPr>
+                </a:tc>
+                <a:extLst>
+                  <a:ext uri="{0D108BD9-81ED-4DB2-BD59-A6C34878D82A}">
+                    <a16:rowId xmlns:a16="http://schemas.microsoft.com/office/drawing/2014/main" xmlns="" val="1883885399"/>
+                  </a:ext>
+                </a:extLst>
+              </a:tr>
+              <a:tr h="930072">
+                <a:tc>
+                  <a:txBody>
+                    <a:bodyPr/>
+                    <a:lstStyle/>
+                    <a:p/>
+                  </a:txBody>
+                  <a:tcPr anchor="ctr">
+                    <a:lnL w="12700" cap="flat" cmpd="sng" algn="ctr">
+                      <a:noFill/>
+                      <a:prstDash val="solid"/>
+                      <a:round/>
+                      <a:headEnd type="none" w="med" len="med"/>
+                      <a:tailEnd type="none" w="med" len="med"/>
+                    </a:lnL>
+                    <a:lnR w="12700" cap="flat" cmpd="sng" algn="ctr">
+                      <a:solidFill>
+                        <a:srgbClr val="D7D7D7"/>
+                      </a:solidFill>
+                      <a:prstDash val="solid"/>
+                      <a:round/>
+                      <a:headEnd type="none" w="med" len="med"/>
+                      <a:tailEnd type="none" w="med" len="med"/>
+                    </a:lnR>
+                    <a:lnT w="12700" cap="flat" cmpd="sng" algn="ctr">
+                      <a:solidFill>
+                        <a:srgbClr val="D7D7D7"/>
+                      </a:solidFill>
+                      <a:prstDash val="solid"/>
+                      <a:round/>
+                      <a:headEnd type="none" w="med" len="med"/>
+                      <a:tailEnd type="none" w="med" len="med"/>
+                    </a:lnT>
+                    <a:lnB w="12700" cap="flat" cmpd="sng" algn="ctr">
+                      <a:noFill/>
+                      <a:prstDash val="solid"/>
+                      <a:round/>
+                      <a:headEnd type="none" w="med" len="med"/>
+                      <a:tailEnd type="none" w="med" len="med"/>
+                    </a:lnB>
+                    <a:lnTlToBr w="12700" cmpd="sng">
+                      <a:noFill/>
+                      <a:prstDash val="solid"/>
+                    </a:lnTlToBr>
+                    <a:lnBlToTr w="12700" cmpd="sng">
+                      <a:noFill/>
+                      <a:prstDash val="solid"/>
+                    </a:lnBlToTr>
+                    <a:solidFill>
+                      <a:schemeClr val="bg1"/>
+                    </a:solidFill>
+                  </a:tcPr>
+                </a:tc>
+                <a:tc>
+                  <a:txBody>
+                    <a:bodyPr/>
+                    <a:lstStyle/>
+                    <a:p/>
+                  </a:txBody>
+                  <a:tcPr anchor="ctr">
+                    <a:lnL w="12700" cap="flat" cmpd="sng" algn="ctr">
+                      <a:solidFill>
+                        <a:srgbClr val="D7D7D7"/>
+                      </a:solidFill>
+                      <a:prstDash val="solid"/>
+                      <a:round/>
+                      <a:headEnd type="none" w="med" len="med"/>
+                      <a:tailEnd type="none" w="med" len="med"/>
+                    </a:lnL>
+                    <a:lnR w="12700" cap="flat" cmpd="sng" algn="ctr">
+                      <a:solidFill>
+                        <a:srgbClr val="D7D7D7"/>
+                      </a:solidFill>
+                      <a:prstDash val="solid"/>
+                      <a:round/>
+                      <a:headEnd type="none" w="med" len="med"/>
+                      <a:tailEnd type="none" w="med" len="med"/>
+                    </a:lnR>
+                    <a:lnT w="12700" cap="flat" cmpd="sng" algn="ctr">
+                      <a:solidFill>
+                        <a:srgbClr val="D7D7D7"/>
+                      </a:solidFill>
+                      <a:prstDash val="solid"/>
+                      <a:round/>
+                      <a:headEnd type="none" w="med" len="med"/>
+                      <a:tailEnd type="none" w="med" len="med"/>
+                    </a:lnT>
+                    <a:lnB w="12700" cap="flat" cmpd="sng" algn="ctr">
+                      <a:noFill/>
+                      <a:prstDash val="solid"/>
+                      <a:round/>
+                      <a:headEnd type="none" w="med" len="med"/>
+                      <a:tailEnd type="none" w="med" len="med"/>
+                    </a:lnB>
+                    <a:lnTlToBr w="12700" cmpd="sng">
+                      <a:noFill/>
+                      <a:prstDash val="solid"/>
+                    </a:lnTlToBr>
+                    <a:lnBlToTr w="12700" cmpd="sng">
+                      <a:noFill/>
+                      <a:prstDash val="solid"/>
+                    </a:lnBlToTr>
+                    <a:solidFill>
+                      <a:schemeClr val="bg1"/>
+                    </a:solidFill>
+                  </a:tcPr>
+                </a:tc>
+                <a:tc>
+                  <a:txBody>
+                    <a:bodyPr/>
+                    <a:lstStyle/>
+                    <a:p/>
+                  </a:txBody>
+                  <a:tcPr anchor="ctr">
+                    <a:lnL w="12700" cap="flat" cmpd="sng" algn="ctr">
+                      <a:solidFill>
+                        <a:srgbClr val="D7D7D7"/>
+                      </a:solidFill>
+                      <a:prstDash val="solid"/>
+                      <a:round/>
+                      <a:headEnd type="none" w="med" len="med"/>
+                      <a:tailEnd type="none" w="med" len="med"/>
+                    </a:lnL>
+                    <a:lnR w="12700" cap="flat" cmpd="sng" algn="ctr">
+                      <a:noFill/>
+                      <a:prstDash val="solid"/>
+                      <a:round/>
+                      <a:headEnd type="none" w="med" len="med"/>
+                      <a:tailEnd type="none" w="med" len="med"/>
+                    </a:lnR>
+                    <a:lnT w="12700" cap="flat" cmpd="sng" algn="ctr">
+                      <a:solidFill>
+                        <a:srgbClr val="D7D7D7"/>
+                      </a:solidFill>
+                      <a:prstDash val="solid"/>
+                      <a:round/>
+                      <a:headEnd type="none" w="med" len="med"/>
+                      <a:tailEnd type="none" w="med" len="med"/>
+                    </a:lnT>
+                    <a:lnB w="12700" cap="flat" cmpd="sng" algn="ctr">
+                      <a:noFill/>
+                      <a:prstDash val="solid"/>
+                      <a:round/>
+                      <a:headEnd type="none" w="med" len="med"/>
+                      <a:tailEnd type="none" w="med" len="med"/>
+                    </a:lnB>
+                    <a:lnTlToBr w="12700" cmpd="sng">
+                      <a:noFill/>
+                      <a:prstDash val="solid"/>
+                    </a:lnTlToBr>
+                    <a:lnBlToTr w="12700" cmpd="sng">
+                      <a:noFill/>
+                      <a:prstDash val="solid"/>
+                    </a:lnBlToTr>
+                    <a:solidFill>
+                      <a:schemeClr val="bg1"/>
+                    </a:solidFill>
+                  </a:tcPr>
+                </a:tc>
+                <a:extLst>
+                  <a:ext uri="{0D108BD9-81ED-4DB2-BD59-A6C34878D82A}">
+                    <a16:rowId xmlns:a16="http://schemas.microsoft.com/office/drawing/2014/main" xmlns="" val="657021450"/>
+                  </a:ext>
+                </a:extLst>
+              </a:tr>
+            </a:tbl>
+          </a:graphicData>
+        </a:graphic>
+      </p:graphicFrame>
+    </p:spTree>
+    <p:extLst>
+      <p:ext uri="{BB962C8B-B14F-4D97-AF65-F5344CB8AC3E}">
+        <p14:creationId xmlns:p14="http://schemas.microsoft.com/office/powerpoint/2010/main" val="3548403830"/>
+      </p:ext>
+    </p:extLst>
+  </p:cSld>
+  <p:clrMapOvr>
+    <a:masterClrMapping/>
+  </p:clrMapOvr>
+  <p:timing>
+    <p:tnLst>
+      <p:par>
+        <p:cTn id="1" dur="indefinite" restart="never" nodeType="tmRoot"/>
+      </p:par>
+    </p:tnLst>
+  </p:timing>
+</p:sld>
+</file>
+
+<file path=ppt/slides/slide3.xml><?xml version="1.0" encoding="utf-8"?>
+<p:sld xmlns:a="http://schemas.openxmlformats.org/drawingml/2006/main" xmlns:r="http://schemas.openxmlformats.org/officeDocument/2006/relationships" xmlns:p="http://schemas.openxmlformats.org/presentationml/2006/main">
+  <p:cSld>
+    <p:spTree>
+      <p:nvGrpSpPr>
+        <p:cNvPr id="1" name=""/>
+        <p:cNvGrpSpPr/>
+        <p:nvPr/>
+      </p:nvGrpSpPr>
+      <p:grpSpPr>
+        <a:xfrm>
+          <a:off x="0" y="0"/>
+          <a:ext cx="0" cy="0"/>
+          <a:chOff x="0" y="0"/>
+          <a:chExt cx="0" cy="0"/>
+        </a:xfrm>
+      </p:grpSpPr>
+      <p:sp>
+        <p:nvSpPr>
+          <p:cNvPr id="56" name="collective_brand_stripe">
+            <a:extLst>
+              <a:ext uri="{FF2B5EF4-FFF2-40B4-BE49-F238E27FC236}">
+                <a16:creationId xmlns:a16="http://schemas.microsoft.com/office/drawing/2014/main" xmlns="" id="{01205505-20CC-09AD-992B-7C58E9666887}"/>
+              </a:ext>
+            </a:extLst>
+          </p:cNvPr>
+          <p:cNvSpPr/>
+          <p:nvPr/>
+        </p:nvSpPr>
+        <p:spPr>
+          <a:xfrm rot="5400000">
+            <a:off x="8444019" y="3110020"/>
+            <a:ext cx="6860555" cy="635405"/>
+          </a:xfrm>
+          <a:prstGeom prst="roundRect">
+            <a:avLst>
+              <a:gd name="adj" fmla="val 0"/>
+            </a:avLst>
+          </a:prstGeom>
+          <a:gradFill>
+            <a:gsLst>
+              <a:gs pos="0">
+                <a:srgbClr val="1D6032"/>
+              </a:gs>
+              <a:gs pos="100000">
+                <a:srgbClr val="4CA33E"/>
+              </a:gs>
+            </a:gsLst>
+            <a:lin ang="2700000" scaled="0"/>
+          </a:gradFill>
+          <a:ln>
+            <a:noFill/>
+          </a:ln>
+        </p:spPr>
+        <p:txBody>
+          <a:bodyPr spcFirstLastPara="1" wrap="square" lIns="24683" tIns="12338" rIns="24683" bIns="12338" anchor="ctr" anchorCtr="0">
+            <a:noAutofit/>
+          </a:bodyPr>
+          <a:lstStyle/>
+          <a:p>
+            <a:pPr marL="108000" algn="l">
+              <a:buClr>
+                <a:srgbClr val="000000"/>
+              </a:buClr>
+              <a:buSzPts val="1800"/>
+            </a:pPr>
+            <a:endParaRPr lang="ru-RU" sz="2400" b="1" dirty="0">
+              <a:solidFill>
+                <a:schemeClr val="bg1"/>
+              </a:solidFill>
+              <a:latin typeface="Arial" panose="020B0604020202020204" pitchFamily="34" charset="0"/>
+              <a:ea typeface="Calibri"/>
+              <a:cs typeface="Arial" panose="020B0604020202020204" pitchFamily="34" charset="0"/>
+              <a:sym typeface="Calibri"/>
+            </a:endParaRPr>
+          </a:p>
+        </p:txBody>
+      </p:sp>
+      <p:graphicFrame>
+        <p:nvGraphicFramePr>
+          <p:cNvPr id="55" name="collective_rows"/>
+          <p:cNvGraphicFramePr/>
+          <p:nvPr>
+            <p:extLst>
+              <p:ext uri="{D42A27DB-BD31-4B8C-83A1-F6EECF244321}">
+                <p14:modId xmlns:p14="http://schemas.microsoft.com/office/powerpoint/2010/main" val="4134327109"/>
+              </p:ext>
+            </p:extLst>
+          </p:nvPr>
+        </p:nvGraphicFramePr>
+        <p:xfrm>
+          <a:off x="77674" y="105438"/>
+          <a:ext cx="11311069" cy="6610851"/>
+        </p:xfrm>
+        <a:graphic>
+          <a:graphicData uri="http://schemas.openxmlformats.org/drawingml/2006/table">
+            <a:tbl>
+              <a:tblPr/>
+              <a:tblGrid>
+                <a:gridCol w="1260675">
+                  <a:extLst>
+                    <a:ext uri="{9D8B030D-6E8A-4147-A177-3AD203B41FA5}">
+                      <a16:colId xmlns:a16="http://schemas.microsoft.com/office/drawing/2014/main" xmlns="" val="20000"/>
+                    </a:ext>
+                  </a:extLst>
+                </a:gridCol>
+                <a:gridCol w="881149">
+                  <a:extLst>
+                    <a:ext uri="{9D8B030D-6E8A-4147-A177-3AD203B41FA5}">
+                      <a16:colId xmlns:a16="http://schemas.microsoft.com/office/drawing/2014/main" xmlns="" val="388146153"/>
+                    </a:ext>
+                  </a:extLst>
+                </a:gridCol>
+                <a:gridCol w="2930472">
+                  <a:extLst>
+                    <a:ext uri="{9D8B030D-6E8A-4147-A177-3AD203B41FA5}">
+                      <a16:colId xmlns:a16="http://schemas.microsoft.com/office/drawing/2014/main" xmlns="" val="20002"/>
+                    </a:ext>
+                  </a:extLst>
+                </a:gridCol>
+                <a:gridCol w="6238773">
+                  <a:extLst>
+                    <a:ext uri="{9D8B030D-6E8A-4147-A177-3AD203B41FA5}">
+                      <a16:colId xmlns:a16="http://schemas.microsoft.com/office/drawing/2014/main" xmlns="" val="20003"/>
+                    </a:ext>
+                  </a:extLst>
+                </a:gridCol>
+              </a:tblGrid>
+              <a:tr h="279890">
+                <a:tc>
+                  <a:txBody>
+                    <a:bodyPr/>
+                    <a:lstStyle/>
+                    <a:p>
+                      <a:pPr algn="ctr" defTabSz="914400">
+                        <a:lnSpc>
+                          <a:spcPct val="100000"/>
+                        </a:lnSpc>
+                      </a:pPr>
+                      <a:r>
+                        <a:rPr lang="ru-RU" sz="1000" b="1" strike="noStrike" spc="-1" dirty="0">
+                          <a:solidFill>
+                            <a:schemeClr val="bg1"/>
+                          </a:solidFill>
+                          <a:latin typeface="Arial" panose="020B0604020202020204" pitchFamily="34" charset="0"/>
+                          <a:cs typeface="Arial" panose="020B0604020202020204" pitchFamily="34" charset="0"/>
+                        </a:rPr>
+                        <a:t>ОМСУ</a:t>
+                      </a:r>
+                      <a:endParaRPr lang="ru-RU" sz="1000" b="0" strike="noStrike" spc="-1" dirty="0">
+                        <a:solidFill>
+                          <a:schemeClr val="bg1"/>
+                        </a:solidFill>
+                        <a:latin typeface="Arial" panose="020B0604020202020204" pitchFamily="34" charset="0"/>
+                        <a:cs typeface="Arial" panose="020B0604020202020204" pitchFamily="34" charset="0"/>
+                      </a:endParaRPr>
+                    </a:p>
+                  </a:txBody>
+                  <a:tcPr anchor="ctr">
+                    <a:lnL w="12700" cap="flat" cmpd="sng" algn="ctr">
+                      <a:noFill/>
+                      <a:prstDash val="solid"/>
+                      <a:round/>
+                      <a:headEnd type="none" w="med" len="med"/>
+                      <a:tailEnd type="none" w="med" len="med"/>
+                    </a:lnL>
+                    <a:lnR w="12700" cap="flat" cmpd="sng" algn="ctr">
+                      <a:solidFill>
+                        <a:schemeClr val="tx2">
+                          <a:lumMod val="90000"/>
+                        </a:schemeClr>
+                      </a:solidFill>
+                      <a:prstDash val="solid"/>
+                      <a:round/>
+                      <a:headEnd type="none" w="med" len="med"/>
+                      <a:tailEnd type="none" w="med" len="med"/>
+                    </a:lnR>
+                    <a:lnT w="12700" cap="flat" cmpd="sng" algn="ctr">
+                      <a:noFill/>
+                      <a:prstDash val="solid"/>
+                      <a:round/>
+                      <a:headEnd type="none" w="med" len="med"/>
+                      <a:tailEnd type="none" w="med" len="med"/>
+                    </a:lnT>
+                    <a:lnB w="12700" cap="flat" cmpd="sng" algn="ctr">
+                      <a:solidFill>
+                        <a:schemeClr val="tx2">
+                          <a:lumMod val="90000"/>
+                        </a:schemeClr>
+                      </a:solidFill>
+                      <a:prstDash val="solid"/>
+                      <a:round/>
+                      <a:headEnd type="none" w="med" len="med"/>
+                      <a:tailEnd type="none" w="med" len="med"/>
+                    </a:lnB>
+                    <a:lnTlToBr w="12700" cmpd="sng">
+                      <a:noFill/>
+                      <a:prstDash val="solid"/>
+                    </a:lnTlToBr>
+                    <a:lnBlToTr w="12700" cmpd="sng">
+                      <a:noFill/>
+                      <a:prstDash val="solid"/>
+                    </a:lnBlToTr>
+                    <a:solidFill>
+                      <a:srgbClr val="67BAE7"/>
+                    </a:solidFill>
+                  </a:tcPr>
+                </a:tc>
+                <a:tc>
+                  <a:txBody>
+                    <a:bodyPr/>
+                    <a:lstStyle/>
+                    <a:p>
+                      <a:pPr algn="ctr" defTabSz="914400">
+                        <a:lnSpc>
+                          <a:spcPct val="100000"/>
+                        </a:lnSpc>
+                      </a:pPr>
+                      <a:r>
+                        <a:rPr lang="ru-RU" sz="1000" b="1" strike="noStrike" spc="-1" dirty="0">
+                          <a:solidFill>
+                            <a:schemeClr val="bg1"/>
+                          </a:solidFill>
+                          <a:latin typeface="Arial" panose="020B0604020202020204" pitchFamily="34" charset="0"/>
+                          <a:cs typeface="Arial" panose="020B0604020202020204" pitchFamily="34" charset="0"/>
+                        </a:rPr>
+                        <a:t>Подписей</a:t>
+                      </a:r>
+                    </a:p>
+                  </a:txBody>
+                  <a:tcPr anchor="ctr">
+                    <a:lnL w="12700" cap="flat" cmpd="sng" algn="ctr">
+                      <a:solidFill>
+                        <a:schemeClr val="tx2">
+                          <a:lumMod val="90000"/>
+                        </a:schemeClr>
+                      </a:solidFill>
+                      <a:prstDash val="solid"/>
+                      <a:round/>
+                      <a:headEnd type="none" w="med" len="med"/>
+                      <a:tailEnd type="none" w="med" len="med"/>
+                    </a:lnL>
+                    <a:lnR w="12700" cap="flat" cmpd="sng" algn="ctr">
+                      <a:solidFill>
+                        <a:schemeClr val="tx2">
+                          <a:lumMod val="90000"/>
+                        </a:schemeClr>
+                      </a:solidFill>
+                      <a:prstDash val="solid"/>
+                      <a:round/>
+                      <a:headEnd type="none" w="med" len="med"/>
+                      <a:tailEnd type="none" w="med" len="med"/>
+                    </a:lnR>
+                    <a:lnT w="12700" cap="flat" cmpd="sng" algn="ctr">
+                      <a:noFill/>
+                      <a:prstDash val="solid"/>
+                      <a:round/>
+                      <a:headEnd type="none" w="med" len="med"/>
+                      <a:tailEnd type="none" w="med" len="med"/>
+                    </a:lnT>
+                    <a:lnB w="12700" cap="flat" cmpd="sng" algn="ctr">
+                      <a:solidFill>
+                        <a:schemeClr val="tx2">
+                          <a:lumMod val="90000"/>
+                        </a:schemeClr>
+                      </a:solidFill>
+                      <a:prstDash val="solid"/>
+                      <a:round/>
+                      <a:headEnd type="none" w="med" len="med"/>
+                      <a:tailEnd type="none" w="med" len="med"/>
+                    </a:lnB>
+                    <a:lnTlToBr w="12700" cmpd="sng">
+                      <a:noFill/>
+                      <a:prstDash val="solid"/>
+                    </a:lnTlToBr>
+                    <a:lnBlToTr w="12700" cmpd="sng">
+                      <a:noFill/>
+                      <a:prstDash val="solid"/>
+                    </a:lnBlToTr>
+                    <a:solidFill>
+                      <a:srgbClr val="67BAE7"/>
+                    </a:solidFill>
+                  </a:tcPr>
+                </a:tc>
+                <a:tc>
+                  <a:txBody>
+                    <a:bodyPr/>
+                    <a:lstStyle/>
+                    <a:p>
+                      <a:pPr algn="ctr" defTabSz="914400">
+                        <a:lnSpc>
+                          <a:spcPct val="100000"/>
+                        </a:lnSpc>
+                      </a:pPr>
+                      <a:r>
+                        <a:rPr lang="ru-RU" sz="1000" b="1" strike="noStrike" spc="-1" dirty="0">
+                          <a:solidFill>
+                            <a:schemeClr val="bg1"/>
+                          </a:solidFill>
+                          <a:latin typeface="Arial" panose="020B0604020202020204" pitchFamily="34" charset="0"/>
+                          <a:ea typeface="Arial"/>
+                          <a:cs typeface="Arial" panose="020B0604020202020204" pitchFamily="34" charset="0"/>
+                        </a:rPr>
+                        <a:t>Краткое содержание</a:t>
+                      </a:r>
+                      <a:endParaRPr lang="ru-RU" sz="1000" b="0" strike="noStrike" spc="-1" dirty="0">
+                        <a:solidFill>
+                          <a:schemeClr val="bg1"/>
+                        </a:solidFill>
+                        <a:latin typeface="Arial" panose="020B0604020202020204" pitchFamily="34" charset="0"/>
+                        <a:cs typeface="Arial" panose="020B0604020202020204" pitchFamily="34" charset="0"/>
+                      </a:endParaRPr>
+                    </a:p>
+                  </a:txBody>
+                  <a:tcPr anchor="ctr">
+                    <a:lnL w="12700" cap="flat" cmpd="sng" algn="ctr">
+                      <a:solidFill>
+                        <a:schemeClr val="tx2">
+                          <a:lumMod val="90000"/>
+                        </a:schemeClr>
+                      </a:solidFill>
+                      <a:prstDash val="solid"/>
+                      <a:round/>
+                      <a:headEnd type="none" w="med" len="med"/>
+                      <a:tailEnd type="none" w="med" len="med"/>
+                    </a:lnL>
+                    <a:lnR w="12700" cap="flat" cmpd="sng" algn="ctr">
+                      <a:solidFill>
+                        <a:schemeClr val="tx2">
+                          <a:lumMod val="90000"/>
+                        </a:schemeClr>
+                      </a:solidFill>
+                      <a:prstDash val="solid"/>
+                      <a:round/>
+                      <a:headEnd type="none" w="med" len="med"/>
+                      <a:tailEnd type="none" w="med" len="med"/>
+                    </a:lnR>
+                    <a:lnT w="12700" cap="flat" cmpd="sng" algn="ctr">
+                      <a:noFill/>
+                      <a:prstDash val="solid"/>
+                      <a:round/>
+                      <a:headEnd type="none" w="med" len="med"/>
+                      <a:tailEnd type="none" w="med" len="med"/>
+                    </a:lnT>
+                    <a:lnB w="12700" cap="flat" cmpd="sng" algn="ctr">
+                      <a:solidFill>
+                        <a:schemeClr val="tx2">
+                          <a:lumMod val="90000"/>
+                        </a:schemeClr>
+                      </a:solidFill>
+                      <a:prstDash val="solid"/>
+                      <a:round/>
+                      <a:headEnd type="none" w="med" len="med"/>
+                      <a:tailEnd type="none" w="med" len="med"/>
+                    </a:lnB>
+                    <a:lnTlToBr w="12700" cmpd="sng">
+                      <a:noFill/>
+                      <a:prstDash val="solid"/>
+                    </a:lnTlToBr>
+                    <a:lnBlToTr w="12700" cmpd="sng">
+                      <a:noFill/>
+                      <a:prstDash val="solid"/>
+                    </a:lnBlToTr>
+                    <a:solidFill>
+                      <a:srgbClr val="67BAE7"/>
+                    </a:solidFill>
+                  </a:tcPr>
+                </a:tc>
+                <a:tc>
+                  <a:txBody>
+                    <a:bodyPr/>
+                    <a:lstStyle/>
+                    <a:p>
+                      <a:pPr algn="ctr" defTabSz="914400">
+                        <a:lnSpc>
+                          <a:spcPct val="100000"/>
+                        </a:lnSpc>
+                        <a:tabLst>
+                          <a:tab pos="0" algn="l"/>
+                        </a:tabLst>
+                      </a:pPr>
+                      <a:r>
+                        <a:rPr lang="ru-RU" sz="1000" b="1" strike="noStrike" spc="-1" dirty="0" smtClean="0">
+                          <a:solidFill>
+                            <a:schemeClr val="bg1"/>
+                          </a:solidFill>
+                          <a:latin typeface="Arial" panose="020B0604020202020204" pitchFamily="34" charset="0"/>
+                          <a:ea typeface="Arial"/>
+                          <a:cs typeface="Arial" panose="020B0604020202020204" pitchFamily="34" charset="0"/>
+                        </a:rPr>
+                        <a:t>Актуальный</a:t>
+                      </a:r>
+                      <a:r>
+                        <a:rPr lang="ru-RU" sz="1000" b="1" strike="noStrike" spc="-1" baseline="0" dirty="0" smtClean="0">
+                          <a:solidFill>
+                            <a:schemeClr val="bg1"/>
+                          </a:solidFill>
+                          <a:latin typeface="Arial" panose="020B0604020202020204" pitchFamily="34" charset="0"/>
+                          <a:ea typeface="Arial"/>
+                          <a:cs typeface="Arial" panose="020B0604020202020204" pitchFamily="34" charset="0"/>
+                        </a:rPr>
+                        <a:t> с</a:t>
+                      </a:r>
+                      <a:r>
+                        <a:rPr lang="ru-RU" sz="1000" b="1" strike="noStrike" spc="-1" dirty="0" smtClean="0">
+                          <a:solidFill>
+                            <a:schemeClr val="bg1"/>
+                          </a:solidFill>
+                          <a:latin typeface="Arial" panose="020B0604020202020204" pitchFamily="34" charset="0"/>
+                          <a:ea typeface="Arial"/>
+                          <a:cs typeface="Arial" panose="020B0604020202020204" pitchFamily="34" charset="0"/>
+                        </a:rPr>
+                        <a:t>татус</a:t>
+                      </a:r>
+                      <a:endParaRPr lang="ru-RU" sz="1000" b="0" strike="noStrike" spc="-1" dirty="0">
+                        <a:solidFill>
+                          <a:schemeClr val="bg1"/>
+                        </a:solidFill>
+                        <a:latin typeface="Arial" panose="020B0604020202020204" pitchFamily="34" charset="0"/>
+                        <a:cs typeface="Arial" panose="020B0604020202020204" pitchFamily="34" charset="0"/>
+                      </a:endParaRPr>
+                    </a:p>
+                  </a:txBody>
+                  <a:tcPr anchor="ctr">
+                    <a:lnL w="12700" cap="flat" cmpd="sng" algn="ctr">
+                      <a:solidFill>
+                        <a:schemeClr val="tx2">
+                          <a:lumMod val="90000"/>
+                        </a:schemeClr>
+                      </a:solidFill>
+                      <a:prstDash val="solid"/>
+                      <a:round/>
+                      <a:headEnd type="none" w="med" len="med"/>
+                      <a:tailEnd type="none" w="med" len="med"/>
+                    </a:lnL>
+                    <a:lnR w="12700" cap="flat" cmpd="sng" algn="ctr">
+                      <a:noFill/>
+                      <a:prstDash val="solid"/>
+                      <a:round/>
+                      <a:headEnd type="none" w="med" len="med"/>
+                      <a:tailEnd type="none" w="med" len="med"/>
+                    </a:lnR>
+                    <a:lnT w="12700" cap="flat" cmpd="sng" algn="ctr">
+                      <a:noFill/>
+                      <a:prstDash val="solid"/>
+                      <a:round/>
+                      <a:headEnd type="none" w="med" len="med"/>
+                      <a:tailEnd type="none" w="med" len="med"/>
+                    </a:lnT>
+                    <a:lnB w="12700" cap="flat" cmpd="sng" algn="ctr">
+                      <a:solidFill>
+                        <a:schemeClr val="tx2">
+                          <a:lumMod val="90000"/>
+                        </a:schemeClr>
+                      </a:solidFill>
+                      <a:prstDash val="solid"/>
+                      <a:round/>
+                      <a:headEnd type="none" w="med" len="med"/>
+                      <a:tailEnd type="none" w="med" len="med"/>
+                    </a:lnB>
+                    <a:lnTlToBr w="12700" cmpd="sng">
+                      <a:noFill/>
+                      <a:prstDash val="solid"/>
+                    </a:lnTlToBr>
+                    <a:lnBlToTr w="12700" cmpd="sng">
+                      <a:noFill/>
+                      <a:prstDash val="solid"/>
+                    </a:lnBlToTr>
+                    <a:solidFill>
+                      <a:srgbClr val="67BAE7"/>
+                    </a:solidFill>
+                  </a:tcPr>
+                </a:tc>
+                <a:extLst>
+                  <a:ext uri="{0D108BD9-81ED-4DB2-BD59-A6C34878D82A}">
+                    <a16:rowId xmlns:a16="http://schemas.microsoft.com/office/drawing/2014/main" xmlns="" val="10000"/>
+                  </a:ext>
+                </a:extLst>
+              </a:tr>
+              <a:tr h="1340922">
+                <a:tc>
+                  <a:txBody>
+                    <a:bodyPr/>
+                    <a:lstStyle/>
+                    <a:p/>
+                  </a:txBody>
+                  <a:tcPr marL="7560" marR="7560" anchor="ctr">
+                    <a:lnL w="12700" cap="flat" cmpd="sng" algn="ctr">
+                      <a:noFill/>
+                      <a:prstDash val="solid"/>
+                      <a:round/>
+                      <a:headEnd type="none" w="med" len="med"/>
+                      <a:tailEnd type="none" w="med" len="med"/>
+                    </a:lnL>
+                    <a:lnR w="12700" cap="flat" cmpd="sng" algn="ctr">
+                      <a:solidFill>
+                        <a:schemeClr val="tx2">
+                          <a:lumMod val="90000"/>
+                        </a:schemeClr>
+                      </a:solidFill>
+                      <a:prstDash val="solid"/>
+                      <a:round/>
+                      <a:headEnd type="none" w="med" len="med"/>
+                      <a:tailEnd type="none" w="med" len="med"/>
+                    </a:lnR>
+                    <a:lnT w="12700" cap="flat" cmpd="sng" algn="ctr">
+                      <a:solidFill>
+                        <a:schemeClr val="tx2">
+                          <a:lumMod val="90000"/>
+                        </a:schemeClr>
+                      </a:solidFill>
+                      <a:prstDash val="solid"/>
+                      <a:round/>
+                      <a:headEnd type="none" w="med" len="med"/>
+                      <a:tailEnd type="none" w="med" len="med"/>
+                    </a:lnT>
+                    <a:lnB w="12700" cap="flat" cmpd="sng" algn="ctr">
+                      <a:solidFill>
+                        <a:schemeClr val="tx2">
+                          <a:lumMod val="90000"/>
+                        </a:schemeClr>
+                      </a:solidFill>
+                      <a:prstDash val="solid"/>
+                      <a:round/>
+                      <a:headEnd type="none" w="med" len="med"/>
+                      <a:tailEnd type="none" w="med" len="med"/>
+                    </a:lnB>
+                    <a:lnTlToBr w="12700" cmpd="sng">
+                      <a:noFill/>
+                      <a:prstDash val="solid"/>
+                    </a:lnTlToBr>
+                    <a:lnBlToTr w="12700" cmpd="sng">
+                      <a:noFill/>
+                      <a:prstDash val="solid"/>
+                    </a:lnBlToTr>
+                    <a:noFill/>
+                  </a:tcPr>
+                </a:tc>
+                <a:tc>
+                  <a:txBody>
+                    <a:bodyPr/>
+                    <a:lstStyle/>
+                    <a:p/>
+                  </a:txBody>
+                  <a:tcPr marL="9525" marR="9525" marT="9525" marB="0" anchor="ctr">
+                    <a:lnL w="12700" cap="flat" cmpd="sng" algn="ctr">
+                      <a:solidFill>
+                        <a:schemeClr val="tx2">
+                          <a:lumMod val="90000"/>
+                        </a:schemeClr>
+                      </a:solidFill>
+                      <a:prstDash val="solid"/>
+                      <a:round/>
+                      <a:headEnd type="none" w="med" len="med"/>
+                      <a:tailEnd type="none" w="med" len="med"/>
+                    </a:lnL>
+                    <a:lnR w="12700" cap="flat" cmpd="sng" algn="ctr">
+                      <a:solidFill>
+                        <a:schemeClr val="tx2">
+                          <a:lumMod val="90000"/>
+                        </a:schemeClr>
+                      </a:solidFill>
+                      <a:prstDash val="solid"/>
+                      <a:round/>
+                      <a:headEnd type="none" w="med" len="med"/>
+                      <a:tailEnd type="none" w="med" len="med"/>
+                    </a:lnR>
+                    <a:lnT w="12700" cap="flat" cmpd="sng" algn="ctr">
+                      <a:solidFill>
+                        <a:schemeClr val="tx2">
+                          <a:lumMod val="90000"/>
+                        </a:schemeClr>
+                      </a:solidFill>
+                      <a:prstDash val="solid"/>
+                      <a:round/>
+                      <a:headEnd type="none" w="med" len="med"/>
+                      <a:tailEnd type="none" w="med" len="med"/>
+                    </a:lnT>
+                    <a:lnB w="12700" cap="flat" cmpd="sng" algn="ctr">
+                      <a:solidFill>
+                        <a:schemeClr val="tx2">
+                          <a:lumMod val="90000"/>
+                        </a:schemeClr>
+                      </a:solidFill>
+                      <a:prstDash val="solid"/>
+                      <a:round/>
+                      <a:headEnd type="none" w="med" len="med"/>
+                      <a:tailEnd type="none" w="med" len="med"/>
+                    </a:lnB>
+                    <a:lnTlToBr w="12700" cmpd="sng">
+                      <a:noFill/>
+                      <a:prstDash val="solid"/>
+                    </a:lnTlToBr>
+                    <a:lnBlToTr w="12700" cmpd="sng">
+                      <a:noFill/>
+                      <a:prstDash val="solid"/>
+                    </a:lnBlToTr>
+                    <a:noFill/>
+                  </a:tcPr>
+                </a:tc>
+                <a:tc>
+                  <a:txBody>
+                    <a:bodyPr/>
+                    <a:lstStyle/>
+                    <a:p/>
+                  </a:txBody>
+                  <a:tcPr marL="72000" marR="72000" anchor="ctr">
+                    <a:lnL w="12700" cap="flat" cmpd="sng" algn="ctr">
+                      <a:solidFill>
+                        <a:schemeClr val="tx2">
+                          <a:lumMod val="90000"/>
+                        </a:schemeClr>
+                      </a:solidFill>
+                      <a:prstDash val="solid"/>
+                      <a:round/>
+                      <a:headEnd type="none" w="med" len="med"/>
+                      <a:tailEnd type="none" w="med" len="med"/>
+                    </a:lnL>
+                    <a:lnR w="12700" cap="flat" cmpd="sng" algn="ctr">
+                      <a:solidFill>
+                        <a:schemeClr val="tx2">
+                          <a:lumMod val="90000"/>
+                        </a:schemeClr>
+                      </a:solidFill>
+                      <a:prstDash val="solid"/>
+                      <a:round/>
+                      <a:headEnd type="none" w="med" len="med"/>
+                      <a:tailEnd type="none" w="med" len="med"/>
+                    </a:lnR>
+                    <a:lnT w="12700" cap="flat" cmpd="sng" algn="ctr">
+                      <a:solidFill>
+                        <a:schemeClr val="tx2">
+                          <a:lumMod val="90000"/>
+                        </a:schemeClr>
+                      </a:solidFill>
+                      <a:prstDash val="solid"/>
+                      <a:round/>
+                      <a:headEnd type="none" w="med" len="med"/>
+                      <a:tailEnd type="none" w="med" len="med"/>
+                    </a:lnT>
+                    <a:lnB w="12700" cap="flat" cmpd="sng" algn="ctr">
+                      <a:solidFill>
+                        <a:schemeClr val="tx2">
+                          <a:lumMod val="90000"/>
+                        </a:schemeClr>
+                      </a:solidFill>
+                      <a:prstDash val="solid"/>
+                      <a:round/>
+                      <a:headEnd type="none" w="med" len="med"/>
+                      <a:tailEnd type="none" w="med" len="med"/>
+                    </a:lnB>
+                    <a:lnTlToBr w="12700" cmpd="sng">
+                      <a:noFill/>
+                      <a:prstDash val="solid"/>
+                    </a:lnTlToBr>
+                    <a:lnBlToTr w="12700" cmpd="sng">
+                      <a:noFill/>
+                      <a:prstDash val="solid"/>
+                    </a:lnBlToTr>
+                    <a:noFill/>
+                  </a:tcPr>
+                </a:tc>
+                <a:tc>
+                  <a:txBody>
+                    <a:bodyPr/>
+                    <a:lstStyle/>
+                    <a:p/>
+                  </a:txBody>
+                  <a:tcPr marL="72000" marR="72000" anchor="ctr">
+                    <a:lnL w="12700" cap="flat" cmpd="sng" algn="ctr">
+                      <a:solidFill>
+                        <a:schemeClr val="tx2">
+                          <a:lumMod val="90000"/>
+                        </a:schemeClr>
+                      </a:solidFill>
+                      <a:prstDash val="solid"/>
+                      <a:round/>
+                      <a:headEnd type="none" w="med" len="med"/>
+                      <a:tailEnd type="none" w="med" len="med"/>
+                    </a:lnL>
+                    <a:lnR w="12700" cap="flat" cmpd="sng" algn="ctr">
+                      <a:noFill/>
+                      <a:prstDash val="solid"/>
+                      <a:round/>
+                      <a:headEnd type="none" w="med" len="med"/>
+                      <a:tailEnd type="none" w="med" len="med"/>
+                    </a:lnR>
+                    <a:lnT w="12700" cap="flat" cmpd="sng" algn="ctr">
+                      <a:solidFill>
+                        <a:schemeClr val="tx2">
+                          <a:lumMod val="90000"/>
+                        </a:schemeClr>
+                      </a:solidFill>
+                      <a:prstDash val="solid"/>
+                      <a:round/>
+                      <a:headEnd type="none" w="med" len="med"/>
+                      <a:tailEnd type="none" w="med" len="med"/>
+                    </a:lnT>
+                    <a:lnB w="12700" cap="flat" cmpd="sng" algn="ctr">
+                      <a:solidFill>
+                        <a:schemeClr val="tx2">
+                          <a:lumMod val="90000"/>
+                        </a:schemeClr>
+                      </a:solidFill>
+                      <a:prstDash val="solid"/>
+                      <a:round/>
+                      <a:headEnd type="none" w="med" len="med"/>
+                      <a:tailEnd type="none" w="med" len="med"/>
+                    </a:lnB>
+                    <a:lnTlToBr w="12700" cmpd="sng">
+                      <a:noFill/>
+                      <a:prstDash val="solid"/>
+                    </a:lnTlToBr>
+                    <a:lnBlToTr w="12700" cmpd="sng">
+                      <a:noFill/>
+                      <a:prstDash val="solid"/>
+                    </a:lnBlToTr>
+                    <a:noFill/>
+                  </a:tcPr>
+                </a:tc>
+                <a:extLst>
+                  <a:ext uri="{0D108BD9-81ED-4DB2-BD59-A6C34878D82A}">
+                    <a16:rowId xmlns:a16="http://schemas.microsoft.com/office/drawing/2014/main" xmlns="" val="10001"/>
+                  </a:ext>
+                </a:extLst>
+              </a:tr>
+            </a:tbl>
+          </a:graphicData>
+        </a:graphic>
+      </p:graphicFrame>
+      <p:sp>
+        <p:nvSpPr>
+          <p:cNvPr id="12" name="collective_page"/>
+          <p:cNvSpPr/>
+          <p:nvPr/>
+        </p:nvSpPr>
+        <p:spPr>
+          <a:xfrm>
+            <a:off x="11725258" y="6436422"/>
+            <a:ext cx="298480" cy="338554"/>
+          </a:xfrm>
+          <a:prstGeom prst="rect">
+            <a:avLst/>
+          </a:prstGeom>
+        </p:spPr>
+        <p:txBody>
+          <a:bodyPr wrap="none">
+            <a:spAutoFit/>
+          </a:bodyPr>
+          <a:lstStyle/>
+          <a:p/>
+        </p:txBody>
+      </p:sp>
+      <p:pic>
+        <p:nvPicPr>
+          <p:cNvPr id="10" name="Рисунок 9">
+            <a:extLst>
+              <a:ext uri="{FF2B5EF4-FFF2-40B4-BE49-F238E27FC236}">
+                <a16:creationId xmlns:a16="http://schemas.microsoft.com/office/drawing/2014/main" xmlns="" id="{C99A2A38-59F6-6169-1EBD-E833CF9D3EE5}"/>
+              </a:ext>
+            </a:extLst>
+          </p:cNvPr>
+          <p:cNvPicPr>
+            <a:picLocks noChangeAspect="1"/>
+          </p:cNvPicPr>
+          <p:nvPr/>
+        </p:nvPicPr>
+        <p:blipFill>
+          <a:blip r:embed="rId2" cstate="print">
+            <a:extLst>
+              <a:ext uri="{28A0092B-C50C-407E-A947-70E740481C1C}">
+                <a14:useLocalDpi xmlns:a14="http://schemas.microsoft.com/office/drawing/2010/main" val="0"/>
+              </a:ext>
+              <a:ext uri="{96DAC541-7B7A-43D3-8B79-37D633B846F1}">
+                <asvg:svgBlip xmlns:asvg="http://schemas.microsoft.com/office/drawing/2016/SVG/main" xmlns="" r:embed="rId3"/>
+              </a:ext>
+            </a:extLst>
+          </a:blip>
+          <a:stretch>
+            <a:fillRect/>
+          </a:stretch>
+        </p:blipFill>
+        <p:spPr>
+          <a:xfrm>
+            <a:off x="11676014" y="132450"/>
+            <a:ext cx="396564" cy="666750"/>
+          </a:xfrm>
+          <a:prstGeom prst="rect">
+            <a:avLst/>
+          </a:prstGeom>
+        </p:spPr>
+      </p:pic>
+    </p:spTree>
+    <p:extLst>
+      <p:ext uri="{BB962C8B-B14F-4D97-AF65-F5344CB8AC3E}">
+        <p14:creationId xmlns:p14="http://schemas.microsoft.com/office/powerpoint/2010/main" val="1460811332"/>
+      </p:ext>
+    </p:extLst>
+  </p:cSld>
+  <p:clrMapOvr>
+    <a:masterClrMapping/>
+  </p:clrMapOvr>
+  <p:timing>
+    <p:tnLst>
+      <p:par>
+        <p:cTn id="1" dur="indefinite" restart="never" nodeType="tmRoot"/>
+      </p:par>
+    </p:tnLst>
+  </p:timing>
+</p:sld>
+</file>
+
+<file path=ppt/slides/slide4.xml><?xml version="1.0" encoding="utf-8"?>
 <p:sld xmlns:a="http://schemas.openxmlformats.org/drawingml/2006/main" xmlns:r="http://schemas.openxmlformats.org/officeDocument/2006/relationships" xmlns:p="http://schemas.openxmlformats.org/presentationml/2006/main">
   <p:cSld>
     <p:spTree>
@@ -11864,2417 +14331,6 @@
     <p:extLst>
       <p:ext uri="{BB962C8B-B14F-4D97-AF65-F5344CB8AC3E}">
         <p14:creationId xmlns:p14="http://schemas.microsoft.com/office/powerpoint/2010/main" val="1553872961"/>
-      </p:ext>
-    </p:extLst>
-  </p:cSld>
-  <p:clrMapOvr>
-    <a:masterClrMapping/>
-  </p:clrMapOvr>
-  <p:timing>
-    <p:tnLst>
-      <p:par>
-        <p:cTn id="1" dur="indefinite" restart="never" nodeType="tmRoot"/>
-      </p:par>
-    </p:tnLst>
-  </p:timing>
-</p:sld>
-</file>
-
-<file path=ppt/slides/slide2.xml><?xml version="1.0" encoding="utf-8"?>
-<p:sld xmlns:a="http://schemas.openxmlformats.org/drawingml/2006/main" xmlns:r="http://schemas.openxmlformats.org/officeDocument/2006/relationships" xmlns:p="http://schemas.openxmlformats.org/presentationml/2006/main">
-  <p:cSld>
-    <p:spTree>
-      <p:nvGrpSpPr>
-        <p:cNvPr id="1" name=""/>
-        <p:cNvGrpSpPr/>
-        <p:nvPr/>
-      </p:nvGrpSpPr>
-      <p:grpSpPr>
-        <a:xfrm>
-          <a:off x="0" y="0"/>
-          <a:ext cx="0" cy="0"/>
-          <a:chOff x="0" y="0"/>
-          <a:chExt cx="0" cy="0"/>
-        </a:xfrm>
-      </p:grpSpPr>
-      <p:sp>
-        <p:nvSpPr>
-          <p:cNvPr id="8" name="collective_page"/>
-          <p:cNvSpPr/>
-          <p:nvPr/>
-        </p:nvSpPr>
-        <p:spPr>
-          <a:xfrm>
-            <a:off x="11725258" y="6436422"/>
-            <a:ext cx="298480" cy="338554"/>
-          </a:xfrm>
-          <a:prstGeom prst="rect">
-            <a:avLst/>
-          </a:prstGeom>
-        </p:spPr>
-        <p:txBody>
-          <a:bodyPr wrap="none">
-            <a:spAutoFit/>
-          </a:bodyPr>
-          <a:lstStyle/>
-          <a:p/>
-        </p:txBody>
-      </p:sp>
-      <p:sp>
-        <p:nvSpPr>
-          <p:cNvPr id="9" name="collective_title">
-            <a:extLst>
-              <a:ext uri="{FF2B5EF4-FFF2-40B4-BE49-F238E27FC236}">
-                <a16:creationId xmlns:a16="http://schemas.microsoft.com/office/drawing/2014/main" xmlns="" id="{E7621DCE-AA24-5CC2-9B7A-2279E0409BFA}"/>
-              </a:ext>
-            </a:extLst>
-          </p:cNvPr>
-          <p:cNvSpPr/>
-          <p:nvPr/>
-        </p:nvSpPr>
-        <p:spPr>
-          <a:xfrm>
-            <a:off x="142301" y="132454"/>
-            <a:ext cx="11284155" cy="483429"/>
-          </a:xfrm>
-          <a:prstGeom prst="roundRect">
-            <a:avLst>
-              <a:gd name="adj" fmla="val 0"/>
-            </a:avLst>
-          </a:prstGeom>
-          <a:gradFill>
-            <a:gsLst>
-              <a:gs pos="0">
-                <a:srgbClr val="1D6032"/>
-              </a:gs>
-              <a:gs pos="100000">
-                <a:srgbClr val="4CA33E"/>
-              </a:gs>
-            </a:gsLst>
-            <a:lin ang="2700000" scaled="0"/>
-          </a:gradFill>
-          <a:ln>
-            <a:noFill/>
-          </a:ln>
-        </p:spPr>
-        <p:txBody>
-          <a:bodyPr spcFirstLastPara="1" wrap="square" lIns="24683" tIns="12339" rIns="24683" bIns="12339" anchor="ctr" anchorCtr="0">
-            <a:noAutofit/>
-          </a:bodyPr>
-          <a:lstStyle/>
-          <a:p>
-            <a:r>
-              <a:t>Коллективные обращения</a:t>
-            </a:r>
-          </a:p>
-        </p:txBody>
-      </p:sp>
-      <p:pic>
-        <p:nvPicPr>
-          <p:cNvPr id="11" name="Рисунок 10">
-            <a:extLst>
-              <a:ext uri="{FF2B5EF4-FFF2-40B4-BE49-F238E27FC236}">
-                <a16:creationId xmlns:a16="http://schemas.microsoft.com/office/drawing/2014/main" xmlns="" id="{C99A2A38-59F6-6169-1EBD-E833CF9D3EE5}"/>
-              </a:ext>
-            </a:extLst>
-          </p:cNvPr>
-          <p:cNvPicPr>
-            <a:picLocks noChangeAspect="1"/>
-          </p:cNvPicPr>
-          <p:nvPr/>
-        </p:nvPicPr>
-        <p:blipFill>
-          <a:blip r:embed="rId2" cstate="print">
-            <a:extLst>
-              <a:ext uri="{28A0092B-C50C-407E-A947-70E740481C1C}">
-                <a14:useLocalDpi xmlns:a14="http://schemas.microsoft.com/office/drawing/2010/main" val="0"/>
-              </a:ext>
-              <a:ext uri="{96DAC541-7B7A-43D3-8B79-37D633B846F1}">
-                <asvg:svgBlip xmlns:asvg="http://schemas.microsoft.com/office/drawing/2016/SVG/main" xmlns="" r:embed="rId3"/>
-              </a:ext>
-            </a:extLst>
-          </a:blip>
-          <a:stretch>
-            <a:fillRect/>
-          </a:stretch>
-        </p:blipFill>
-        <p:spPr>
-          <a:xfrm>
-            <a:off x="11676014" y="132450"/>
-            <a:ext cx="396564" cy="666750"/>
-          </a:xfrm>
-          <a:prstGeom prst="rect">
-            <a:avLst/>
-          </a:prstGeom>
-        </p:spPr>
-      </p:pic>
-      <p:sp>
-        <p:nvSpPr>
-          <p:cNvPr id="12" name="collective_page">
-            <a:extLst>
-              <a:ext uri="{FF2B5EF4-FFF2-40B4-BE49-F238E27FC236}">
-                <a16:creationId xmlns:a16="http://schemas.microsoft.com/office/drawing/2014/main" xmlns="" id="{F7A0EB90-9E0A-4AB0-9B6D-29A5E4576272}"/>
-              </a:ext>
-            </a:extLst>
-          </p:cNvPr>
-          <p:cNvSpPr txBox="1"/>
-          <p:nvPr/>
-        </p:nvSpPr>
-        <p:spPr>
-          <a:xfrm>
-            <a:off x="11638350" y="6305461"/>
-            <a:ext cx="437700" cy="433364"/>
-          </a:xfrm>
-          <a:prstGeom prst="rect">
-            <a:avLst/>
-          </a:prstGeom>
-          <a:noFill/>
-          <a:ln>
-            <a:noFill/>
-          </a:ln>
-        </p:spPr>
-        <p:txBody>
-          <a:bodyPr spcFirstLastPara="1" wrap="square" lIns="91425" tIns="45700" rIns="91425" bIns="45700" anchor="ctr" anchorCtr="0">
-            <a:noAutofit/>
-          </a:bodyPr>
-          <a:lstStyle/>
-          <a:p/>
-        </p:txBody>
-      </p:sp>
-      <p:graphicFrame>
-        <p:nvGraphicFramePr>
-          <p:cNvPr id="13" name="collective_totals"/>
-          <p:cNvGraphicFramePr>
-            <a:graphicFrameLocks noGrp="1"/>
-          </p:cNvGraphicFramePr>
-          <p:nvPr>
-            <p:extLst>
-              <p:ext uri="{D42A27DB-BD31-4B8C-83A1-F6EECF244321}">
-                <p14:modId xmlns:p14="http://schemas.microsoft.com/office/powerpoint/2010/main" val="1463491032"/>
-              </p:ext>
-            </p:extLst>
-          </p:nvPr>
-        </p:nvGraphicFramePr>
-        <p:xfrm>
-          <a:off x="142300" y="799200"/>
-          <a:ext cx="11284156" cy="2168358"/>
-        </p:xfrm>
-        <a:graphic>
-          <a:graphicData uri="http://schemas.openxmlformats.org/drawingml/2006/table">
-            <a:tbl>
-              <a:tblPr/>
-              <a:tblGrid>
-                <a:gridCol w="1574357">
-                  <a:extLst>
-                    <a:ext uri="{9D8B030D-6E8A-4147-A177-3AD203B41FA5}">
-                      <a16:colId xmlns:a16="http://schemas.microsoft.com/office/drawing/2014/main" xmlns="" val="1646718413"/>
-                    </a:ext>
-                  </a:extLst>
-                </a:gridCol>
-                <a:gridCol w="4649637">
-                  <a:extLst>
-                    <a:ext uri="{9D8B030D-6E8A-4147-A177-3AD203B41FA5}">
-                      <a16:colId xmlns:a16="http://schemas.microsoft.com/office/drawing/2014/main" xmlns="" val="792188316"/>
-                    </a:ext>
-                  </a:extLst>
-                </a:gridCol>
-                <a:gridCol w="2044461">
-                  <a:extLst>
-                    <a:ext uri="{9D8B030D-6E8A-4147-A177-3AD203B41FA5}">
-                      <a16:colId xmlns:a16="http://schemas.microsoft.com/office/drawing/2014/main" xmlns="" val="2077654746"/>
-                    </a:ext>
-                  </a:extLst>
-                </a:gridCol>
-                <a:gridCol w="3015701">
-                  <a:extLst>
-                    <a:ext uri="{9D8B030D-6E8A-4147-A177-3AD203B41FA5}">
-                      <a16:colId xmlns:a16="http://schemas.microsoft.com/office/drawing/2014/main" xmlns="" val="4173832101"/>
-                    </a:ext>
-                  </a:extLst>
-                </a:gridCol>
-              </a:tblGrid>
-              <a:tr h="622276">
-                <a:tc gridSpan="4">
-                  <a:txBody>
-                    <a:bodyPr/>
-                    <a:lstStyle/>
-                    <a:p/>
-                  </a:txBody>
-                  <a:tcPr marL="6371" marR="6371" marT="6371" marB="0" anchor="ctr">
-                    <a:lnL w="12700" cap="flat" cmpd="sng" algn="ctr">
-                      <a:solidFill>
-                        <a:schemeClr val="bg1"/>
-                      </a:solidFill>
-                      <a:prstDash val="solid"/>
-                      <a:round/>
-                      <a:headEnd type="none" w="med" len="med"/>
-                      <a:tailEnd type="none" w="med" len="med"/>
-                    </a:lnL>
-                    <a:lnR w="12700" cap="flat" cmpd="sng" algn="ctr">
-                      <a:solidFill>
-                        <a:schemeClr val="bg1"/>
-                      </a:solidFill>
-                      <a:prstDash val="solid"/>
-                      <a:round/>
-                      <a:headEnd type="none" w="med" len="med"/>
-                      <a:tailEnd type="none" w="med" len="med"/>
-                    </a:lnR>
-                    <a:lnT w="12700" cap="flat" cmpd="sng" algn="ctr">
-                      <a:solidFill>
-                        <a:schemeClr val="bg1"/>
-                      </a:solidFill>
-                      <a:prstDash val="solid"/>
-                      <a:round/>
-                      <a:headEnd type="none" w="med" len="med"/>
-                      <a:tailEnd type="none" w="med" len="med"/>
-                    </a:lnT>
-                    <a:lnB w="12700" cap="flat" cmpd="sng" algn="ctr">
-                      <a:noFill/>
-                      <a:prstDash val="solid"/>
-                      <a:round/>
-                      <a:headEnd type="none" w="med" len="med"/>
-                      <a:tailEnd type="none" w="med" len="med"/>
-                    </a:lnB>
-                    <a:lnTlToBr w="12700" cmpd="sng">
-                      <a:noFill/>
-                      <a:prstDash val="solid"/>
-                    </a:lnTlToBr>
-                    <a:lnBlToTr w="12700" cmpd="sng">
-                      <a:noFill/>
-                      <a:prstDash val="solid"/>
-                    </a:lnBlToTr>
-                    <a:solidFill>
-                      <a:srgbClr val="67BAE7"/>
-                    </a:solidFill>
-                  </a:tcPr>
-                </a:tc>
-                <a:tc hMerge="1">
-                  <a:txBody>
-                    <a:bodyPr/>
-                    <a:lstStyle/>
-                    <a:p/>
-                  </a:txBody>
-                  <a:tcPr marL="6371" marR="6371" marT="6371" marB="0" anchor="ctr">
-                    <a:lnL w="12700" cap="flat" cmpd="sng" algn="ctr">
-                      <a:solidFill>
-                        <a:schemeClr val="bg1"/>
-                      </a:solidFill>
-                      <a:prstDash val="solid"/>
-                      <a:round/>
-                      <a:headEnd type="none" w="med" len="med"/>
-                      <a:tailEnd type="none" w="med" len="med"/>
-                    </a:lnL>
-                    <a:lnR w="12700" cap="flat" cmpd="sng" algn="ctr">
-                      <a:solidFill>
-                        <a:schemeClr val="bg1"/>
-                      </a:solidFill>
-                      <a:prstDash val="solid"/>
-                      <a:round/>
-                      <a:headEnd type="none" w="med" len="med"/>
-                      <a:tailEnd type="none" w="med" len="med"/>
-                    </a:lnR>
-                    <a:lnT w="12700" cap="flat" cmpd="sng" algn="ctr">
-                      <a:solidFill>
-                        <a:schemeClr val="bg1"/>
-                      </a:solidFill>
-                      <a:prstDash val="solid"/>
-                      <a:round/>
-                      <a:headEnd type="none" w="med" len="med"/>
-                      <a:tailEnd type="none" w="med" len="med"/>
-                    </a:lnT>
-                    <a:lnB w="12700" cap="flat" cmpd="sng" algn="ctr">
-                      <a:solidFill>
-                        <a:schemeClr val="bg1"/>
-                      </a:solidFill>
-                      <a:prstDash val="solid"/>
-                      <a:round/>
-                      <a:headEnd type="none" w="med" len="med"/>
-                      <a:tailEnd type="none" w="med" len="med"/>
-                    </a:lnB>
-                    <a:lnTlToBr w="12700" cmpd="sng">
-                      <a:noFill/>
-                      <a:prstDash val="solid"/>
-                    </a:lnTlToBr>
-                    <a:lnBlToTr w="12700" cmpd="sng">
-                      <a:noFill/>
-                      <a:prstDash val="solid"/>
-                    </a:lnBlToTr>
-                    <a:solidFill>
-                      <a:srgbClr val="67BAE7"/>
-                    </a:solidFill>
-                  </a:tcPr>
-                </a:tc>
-                <a:tc hMerge="1">
-                  <a:txBody>
-                    <a:bodyPr/>
-                    <a:lstStyle/>
-                    <a:p/>
-                  </a:txBody>
-                  <a:tcPr marL="6371" marR="6371" marT="6371" marB="0" anchor="ctr">
-                    <a:lnL w="12700" cap="flat" cmpd="sng" algn="ctr">
-                      <a:solidFill>
-                        <a:schemeClr val="bg1"/>
-                      </a:solidFill>
-                      <a:prstDash val="solid"/>
-                      <a:round/>
-                      <a:headEnd type="none" w="med" len="med"/>
-                      <a:tailEnd type="none" w="med" len="med"/>
-                    </a:lnL>
-                    <a:lnR w="12700" cap="flat" cmpd="sng" algn="ctr">
-                      <a:solidFill>
-                        <a:schemeClr val="bg1"/>
-                      </a:solidFill>
-                      <a:prstDash val="solid"/>
-                      <a:round/>
-                      <a:headEnd type="none" w="med" len="med"/>
-                      <a:tailEnd type="none" w="med" len="med"/>
-                    </a:lnR>
-                    <a:lnT w="12700" cap="flat" cmpd="sng" algn="ctr">
-                      <a:solidFill>
-                        <a:schemeClr val="bg1"/>
-                      </a:solidFill>
-                      <a:prstDash val="solid"/>
-                      <a:round/>
-                      <a:headEnd type="none" w="med" len="med"/>
-                      <a:tailEnd type="none" w="med" len="med"/>
-                    </a:lnT>
-                    <a:lnB w="12700" cap="flat" cmpd="sng" algn="ctr">
-                      <a:solidFill>
-                        <a:schemeClr val="bg1"/>
-                      </a:solidFill>
-                      <a:prstDash val="solid"/>
-                      <a:round/>
-                      <a:headEnd type="none" w="med" len="med"/>
-                      <a:tailEnd type="none" w="med" len="med"/>
-                    </a:lnB>
-                    <a:lnTlToBr w="12700" cmpd="sng">
-                      <a:noFill/>
-                      <a:prstDash val="solid"/>
-                    </a:lnTlToBr>
-                    <a:lnBlToTr w="12700" cmpd="sng">
-                      <a:noFill/>
-                      <a:prstDash val="solid"/>
-                    </a:lnBlToTr>
-                    <a:solidFill>
-                      <a:srgbClr val="67BAE7"/>
-                    </a:solidFill>
-                  </a:tcPr>
-                </a:tc>
-                <a:tc hMerge="1">
-                  <a:txBody>
-                    <a:bodyPr/>
-                    <a:lstStyle/>
-                    <a:p/>
-                  </a:txBody>
-                  <a:tcPr marL="6371" marR="6371" marT="6371" marB="0" anchor="ctr">
-                    <a:lnL w="12700" cap="flat" cmpd="sng" algn="ctr">
-                      <a:solidFill>
-                        <a:schemeClr val="bg1"/>
-                      </a:solidFill>
-                      <a:prstDash val="solid"/>
-                      <a:round/>
-                      <a:headEnd type="none" w="med" len="med"/>
-                      <a:tailEnd type="none" w="med" len="med"/>
-                    </a:lnL>
-                    <a:lnR w="12700" cap="flat" cmpd="sng" algn="ctr">
-                      <a:solidFill>
-                        <a:schemeClr val="bg1"/>
-                      </a:solidFill>
-                      <a:prstDash val="solid"/>
-                      <a:round/>
-                      <a:headEnd type="none" w="med" len="med"/>
-                      <a:tailEnd type="none" w="med" len="med"/>
-                    </a:lnR>
-                    <a:lnT w="12700" cap="flat" cmpd="sng" algn="ctr">
-                      <a:solidFill>
-                        <a:schemeClr val="bg1"/>
-                      </a:solidFill>
-                      <a:prstDash val="solid"/>
-                      <a:round/>
-                      <a:headEnd type="none" w="med" len="med"/>
-                      <a:tailEnd type="none" w="med" len="med"/>
-                    </a:lnT>
-                    <a:lnB w="12700" cap="flat" cmpd="sng" algn="ctr">
-                      <a:solidFill>
-                        <a:schemeClr val="bg1"/>
-                      </a:solidFill>
-                      <a:prstDash val="solid"/>
-                      <a:round/>
-                      <a:headEnd type="none" w="med" len="med"/>
-                      <a:tailEnd type="none" w="med" len="med"/>
-                    </a:lnB>
-                    <a:lnTlToBr w="12700" cmpd="sng">
-                      <a:noFill/>
-                      <a:prstDash val="solid"/>
-                    </a:lnTlToBr>
-                    <a:lnBlToTr w="12700" cmpd="sng">
-                      <a:noFill/>
-                      <a:prstDash val="solid"/>
-                    </a:lnBlToTr>
-                    <a:solidFill>
-                      <a:srgbClr val="67BAE7"/>
-                    </a:solidFill>
-                  </a:tcPr>
-                </a:tc>
-                <a:extLst>
-                  <a:ext uri="{0D108BD9-81ED-4DB2-BD59-A6C34878D82A}">
-                    <a16:rowId xmlns:a16="http://schemas.microsoft.com/office/drawing/2014/main" xmlns="" val="2066328557"/>
-                  </a:ext>
-                </a:extLst>
-              </a:tr>
-              <a:tr h="544015">
-                <a:tc>
-                  <a:txBody>
-                    <a:bodyPr/>
-                    <a:lstStyle/>
-                    <a:p/>
-                  </a:txBody>
-                  <a:tcPr anchor="ctr">
-                    <a:lnL w="12700" cap="flat" cmpd="sng" algn="ctr">
-                      <a:noFill/>
-                      <a:prstDash val="solid"/>
-                      <a:round/>
-                      <a:headEnd type="none" w="med" len="med"/>
-                      <a:tailEnd type="none" w="med" len="med"/>
-                    </a:lnL>
-                    <a:lnR w="12700" cap="flat" cmpd="sng" algn="ctr">
-                      <a:solidFill>
-                        <a:srgbClr val="D7D7D7"/>
-                      </a:solidFill>
-                      <a:prstDash val="solid"/>
-                      <a:round/>
-                      <a:headEnd type="none" w="med" len="med"/>
-                      <a:tailEnd type="none" w="med" len="med"/>
-                    </a:lnR>
-                    <a:lnT w="12700" cap="flat" cmpd="sng" algn="ctr">
-                      <a:noFill/>
-                      <a:prstDash val="solid"/>
-                      <a:round/>
-                      <a:headEnd type="none" w="med" len="med"/>
-                      <a:tailEnd type="none" w="med" len="med"/>
-                    </a:lnT>
-                    <a:lnB w="12700" cap="flat" cmpd="sng" algn="ctr">
-                      <a:solidFill>
-                        <a:srgbClr val="D7D7D7"/>
-                      </a:solidFill>
-                      <a:prstDash val="solid"/>
-                      <a:round/>
-                      <a:headEnd type="none" w="med" len="med"/>
-                      <a:tailEnd type="none" w="med" len="med"/>
-                    </a:lnB>
-                    <a:lnTlToBr w="12700" cmpd="sng">
-                      <a:noFill/>
-                      <a:prstDash val="solid"/>
-                    </a:lnTlToBr>
-                    <a:lnBlToTr w="12700" cmpd="sng">
-                      <a:noFill/>
-                      <a:prstDash val="solid"/>
-                    </a:lnBlToTr>
-                    <a:solidFill>
-                      <a:schemeClr val="bg1"/>
-                    </a:solidFill>
-                  </a:tcPr>
-                </a:tc>
-                <a:tc>
-                  <a:txBody>
-                    <a:bodyPr/>
-                    <a:lstStyle/>
-                    <a:p/>
-                  </a:txBody>
-                  <a:tcPr anchor="ctr">
-                    <a:lnL w="12700" cap="flat" cmpd="sng" algn="ctr">
-                      <a:solidFill>
-                        <a:srgbClr val="D7D7D7"/>
-                      </a:solidFill>
-                      <a:prstDash val="solid"/>
-                      <a:round/>
-                      <a:headEnd type="none" w="med" len="med"/>
-                      <a:tailEnd type="none" w="med" len="med"/>
-                    </a:lnL>
-                    <a:lnR w="12700" cap="flat" cmpd="sng" algn="ctr">
-                      <a:solidFill>
-                        <a:srgbClr val="D7D7D7"/>
-                      </a:solidFill>
-                      <a:prstDash val="solid"/>
-                      <a:round/>
-                      <a:headEnd type="none" w="med" len="med"/>
-                      <a:tailEnd type="none" w="med" len="med"/>
-                    </a:lnR>
-                    <a:lnT w="12700" cap="flat" cmpd="sng" algn="ctr">
-                      <a:noFill/>
-                      <a:prstDash val="solid"/>
-                      <a:round/>
-                      <a:headEnd type="none" w="med" len="med"/>
-                      <a:tailEnd type="none" w="med" len="med"/>
-                    </a:lnT>
-                    <a:lnB w="12700" cap="flat" cmpd="sng" algn="ctr">
-                      <a:solidFill>
-                        <a:srgbClr val="D7D7D7"/>
-                      </a:solidFill>
-                      <a:prstDash val="solid"/>
-                      <a:round/>
-                      <a:headEnd type="none" w="med" len="med"/>
-                      <a:tailEnd type="none" w="med" len="med"/>
-                    </a:lnB>
-                    <a:lnTlToBr w="12700" cmpd="sng">
-                      <a:noFill/>
-                      <a:prstDash val="solid"/>
-                    </a:lnTlToBr>
-                    <a:lnBlToTr w="12700" cmpd="sng">
-                      <a:noFill/>
-                      <a:prstDash val="solid"/>
-                    </a:lnBlToTr>
-                    <a:solidFill>
-                      <a:schemeClr val="bg1"/>
-                    </a:solidFill>
-                  </a:tcPr>
-                </a:tc>
-                <a:tc>
-                  <a:txBody>
-                    <a:bodyPr/>
-                    <a:lstStyle/>
-                    <a:p/>
-                  </a:txBody>
-                  <a:tcPr anchor="ctr">
-                    <a:lnL w="12700" cap="flat" cmpd="sng" algn="ctr">
-                      <a:solidFill>
-                        <a:srgbClr val="D7D7D7"/>
-                      </a:solidFill>
-                      <a:prstDash val="solid"/>
-                      <a:round/>
-                      <a:headEnd type="none" w="med" len="med"/>
-                      <a:tailEnd type="none" w="med" len="med"/>
-                    </a:lnL>
-                    <a:lnR w="12700" cap="flat" cmpd="sng" algn="ctr">
-                      <a:solidFill>
-                        <a:srgbClr val="D7D7D7"/>
-                      </a:solidFill>
-                      <a:prstDash val="solid"/>
-                      <a:round/>
-                      <a:headEnd type="none" w="med" len="med"/>
-                      <a:tailEnd type="none" w="med" len="med"/>
-                    </a:lnR>
-                    <a:lnT w="12700" cap="flat" cmpd="sng" algn="ctr">
-                      <a:noFill/>
-                      <a:prstDash val="solid"/>
-                      <a:round/>
-                      <a:headEnd type="none" w="med" len="med"/>
-                      <a:tailEnd type="none" w="med" len="med"/>
-                    </a:lnT>
-                    <a:lnB w="12700" cap="flat" cmpd="sng" algn="ctr">
-                      <a:solidFill>
-                        <a:srgbClr val="D7D7D7"/>
-                      </a:solidFill>
-                      <a:prstDash val="solid"/>
-                      <a:round/>
-                      <a:headEnd type="none" w="med" len="med"/>
-                      <a:tailEnd type="none" w="med" len="med"/>
-                    </a:lnB>
-                    <a:lnTlToBr w="12700" cmpd="sng">
-                      <a:noFill/>
-                      <a:prstDash val="solid"/>
-                    </a:lnTlToBr>
-                    <a:lnBlToTr w="12700" cmpd="sng">
-                      <a:noFill/>
-                      <a:prstDash val="solid"/>
-                    </a:lnBlToTr>
-                    <a:solidFill>
-                      <a:schemeClr val="bg1"/>
-                    </a:solidFill>
-                  </a:tcPr>
-                </a:tc>
-                <a:tc>
-                  <a:txBody>
-                    <a:bodyPr/>
-                    <a:lstStyle/>
-                    <a:p/>
-                  </a:txBody>
-                  <a:tcPr anchor="ctr">
-                    <a:lnL w="12700" cap="flat" cmpd="sng" algn="ctr">
-                      <a:solidFill>
-                        <a:srgbClr val="D7D7D7"/>
-                      </a:solidFill>
-                      <a:prstDash val="solid"/>
-                      <a:round/>
-                      <a:headEnd type="none" w="med" len="med"/>
-                      <a:tailEnd type="none" w="med" len="med"/>
-                    </a:lnL>
-                    <a:lnR w="12700" cap="flat" cmpd="sng" algn="ctr">
-                      <a:noFill/>
-                      <a:prstDash val="solid"/>
-                      <a:round/>
-                      <a:headEnd type="none" w="med" len="med"/>
-                      <a:tailEnd type="none" w="med" len="med"/>
-                    </a:lnR>
-                    <a:lnT w="12700" cap="flat" cmpd="sng" algn="ctr">
-                      <a:noFill/>
-                      <a:prstDash val="solid"/>
-                      <a:round/>
-                      <a:headEnd type="none" w="med" len="med"/>
-                      <a:tailEnd type="none" w="med" len="med"/>
-                    </a:lnT>
-                    <a:lnB w="12700" cap="flat" cmpd="sng" algn="ctr">
-                      <a:solidFill>
-                        <a:srgbClr val="D7D7D7"/>
-                      </a:solidFill>
-                      <a:prstDash val="solid"/>
-                      <a:round/>
-                      <a:headEnd type="none" w="med" len="med"/>
-                      <a:tailEnd type="none" w="med" len="med"/>
-                    </a:lnB>
-                    <a:lnTlToBr w="12700" cmpd="sng">
-                      <a:noFill/>
-                      <a:prstDash val="solid"/>
-                    </a:lnTlToBr>
-                    <a:lnBlToTr w="12700" cmpd="sng">
-                      <a:noFill/>
-                      <a:prstDash val="solid"/>
-                    </a:lnBlToTr>
-                    <a:solidFill>
-                      <a:schemeClr val="bg1"/>
-                    </a:solidFill>
-                  </a:tcPr>
-                </a:tc>
-                <a:extLst>
-                  <a:ext uri="{0D108BD9-81ED-4DB2-BD59-A6C34878D82A}">
-                    <a16:rowId xmlns:a16="http://schemas.microsoft.com/office/drawing/2014/main" xmlns="" val="1507558984"/>
-                  </a:ext>
-                </a:extLst>
-              </a:tr>
-              <a:tr h="1002067">
-                <a:tc>
-                  <a:txBody>
-                    <a:bodyPr/>
-                    <a:lstStyle/>
-                    <a:p/>
-                  </a:txBody>
-                  <a:tcPr anchor="ctr">
-                    <a:lnL w="12700" cap="flat" cmpd="sng" algn="ctr">
-                      <a:noFill/>
-                      <a:prstDash val="solid"/>
-                      <a:round/>
-                      <a:headEnd type="none" w="med" len="med"/>
-                      <a:tailEnd type="none" w="med" len="med"/>
-                    </a:lnL>
-                    <a:lnR w="12700" cap="flat" cmpd="sng" algn="ctr">
-                      <a:solidFill>
-                        <a:srgbClr val="D7D7D7"/>
-                      </a:solidFill>
-                      <a:prstDash val="solid"/>
-                      <a:round/>
-                      <a:headEnd type="none" w="med" len="med"/>
-                      <a:tailEnd type="none" w="med" len="med"/>
-                    </a:lnR>
-                    <a:lnT w="12700" cap="flat" cmpd="sng" algn="ctr">
-                      <a:solidFill>
-                        <a:srgbClr val="D7D7D7"/>
-                      </a:solidFill>
-                      <a:prstDash val="solid"/>
-                      <a:round/>
-                      <a:headEnd type="none" w="med" len="med"/>
-                      <a:tailEnd type="none" w="med" len="med"/>
-                    </a:lnT>
-                    <a:lnB w="12700" cap="flat" cmpd="sng" algn="ctr">
-                      <a:noFill/>
-                      <a:prstDash val="solid"/>
-                      <a:round/>
-                      <a:headEnd type="none" w="med" len="med"/>
-                      <a:tailEnd type="none" w="med" len="med"/>
-                    </a:lnB>
-                    <a:lnTlToBr w="12700" cmpd="sng">
-                      <a:noFill/>
-                      <a:prstDash val="solid"/>
-                    </a:lnTlToBr>
-                    <a:lnBlToTr w="12700" cmpd="sng">
-                      <a:noFill/>
-                      <a:prstDash val="solid"/>
-                    </a:lnBlToTr>
-                    <a:solidFill>
-                      <a:schemeClr val="bg1"/>
-                    </a:solidFill>
-                  </a:tcPr>
-                </a:tc>
-                <a:tc>
-                  <a:txBody>
-                    <a:bodyPr/>
-                    <a:lstStyle/>
-                    <a:p/>
-                  </a:txBody>
-                  <a:tcPr anchor="ctr">
-                    <a:lnL w="12700" cap="flat" cmpd="sng" algn="ctr">
-                      <a:solidFill>
-                        <a:srgbClr val="D7D7D7"/>
-                      </a:solidFill>
-                      <a:prstDash val="solid"/>
-                      <a:round/>
-                      <a:headEnd type="none" w="med" len="med"/>
-                      <a:tailEnd type="none" w="med" len="med"/>
-                    </a:lnL>
-                    <a:lnR w="12700" cap="flat" cmpd="sng" algn="ctr">
-                      <a:solidFill>
-                        <a:srgbClr val="D7D7D7"/>
-                      </a:solidFill>
-                      <a:prstDash val="solid"/>
-                      <a:round/>
-                      <a:headEnd type="none" w="med" len="med"/>
-                      <a:tailEnd type="none" w="med" len="med"/>
-                    </a:lnR>
-                    <a:lnT w="12700" cap="flat" cmpd="sng" algn="ctr">
-                      <a:solidFill>
-                        <a:srgbClr val="D7D7D7"/>
-                      </a:solidFill>
-                      <a:prstDash val="solid"/>
-                      <a:round/>
-                      <a:headEnd type="none" w="med" len="med"/>
-                      <a:tailEnd type="none" w="med" len="med"/>
-                    </a:lnT>
-                    <a:lnB w="12700" cap="flat" cmpd="sng" algn="ctr">
-                      <a:noFill/>
-                      <a:prstDash val="solid"/>
-                      <a:round/>
-                      <a:headEnd type="none" w="med" len="med"/>
-                      <a:tailEnd type="none" w="med" len="med"/>
-                    </a:lnB>
-                    <a:lnTlToBr w="12700" cmpd="sng">
-                      <a:noFill/>
-                      <a:prstDash val="solid"/>
-                    </a:lnTlToBr>
-                    <a:lnBlToTr w="12700" cmpd="sng">
-                      <a:noFill/>
-                      <a:prstDash val="solid"/>
-                    </a:lnBlToTr>
-                    <a:solidFill>
-                      <a:schemeClr val="bg1"/>
-                    </a:solidFill>
-                  </a:tcPr>
-                </a:tc>
-                <a:tc>
-                  <a:txBody>
-                    <a:bodyPr/>
-                    <a:lstStyle/>
-                    <a:p/>
-                  </a:txBody>
-                  <a:tcPr anchor="ctr">
-                    <a:lnL w="12700" cap="flat" cmpd="sng" algn="ctr">
-                      <a:solidFill>
-                        <a:srgbClr val="D7D7D7"/>
-                      </a:solidFill>
-                      <a:prstDash val="solid"/>
-                      <a:round/>
-                      <a:headEnd type="none" w="med" len="med"/>
-                      <a:tailEnd type="none" w="med" len="med"/>
-                    </a:lnL>
-                    <a:lnR w="12700" cap="flat" cmpd="sng" algn="ctr">
-                      <a:solidFill>
-                        <a:srgbClr val="D7D7D7"/>
-                      </a:solidFill>
-                      <a:prstDash val="solid"/>
-                      <a:round/>
-                      <a:headEnd type="none" w="med" len="med"/>
-                      <a:tailEnd type="none" w="med" len="med"/>
-                    </a:lnR>
-                    <a:lnT w="12700" cap="flat" cmpd="sng" algn="ctr">
-                      <a:solidFill>
-                        <a:srgbClr val="D7D7D7"/>
-                      </a:solidFill>
-                      <a:prstDash val="solid"/>
-                      <a:round/>
-                      <a:headEnd type="none" w="med" len="med"/>
-                      <a:tailEnd type="none" w="med" len="med"/>
-                    </a:lnT>
-                    <a:lnB w="12700" cap="flat" cmpd="sng" algn="ctr">
-                      <a:noFill/>
-                      <a:prstDash val="solid"/>
-                      <a:round/>
-                      <a:headEnd type="none" w="med" len="med"/>
-                      <a:tailEnd type="none" w="med" len="med"/>
-                    </a:lnB>
-                    <a:lnTlToBr w="12700" cmpd="sng">
-                      <a:noFill/>
-                      <a:prstDash val="solid"/>
-                    </a:lnTlToBr>
-                    <a:lnBlToTr w="12700" cmpd="sng">
-                      <a:noFill/>
-                      <a:prstDash val="solid"/>
-                    </a:lnBlToTr>
-                    <a:solidFill>
-                      <a:schemeClr val="bg1"/>
-                    </a:solidFill>
-                  </a:tcPr>
-                </a:tc>
-                <a:tc>
-                  <a:txBody>
-                    <a:bodyPr/>
-                    <a:lstStyle/>
-                    <a:p/>
-                  </a:txBody>
-                  <a:tcPr anchor="ctr">
-                    <a:lnL w="12700" cap="flat" cmpd="sng" algn="ctr">
-                      <a:solidFill>
-                        <a:srgbClr val="D7D7D7"/>
-                      </a:solidFill>
-                      <a:prstDash val="solid"/>
-                      <a:round/>
-                      <a:headEnd type="none" w="med" len="med"/>
-                      <a:tailEnd type="none" w="med" len="med"/>
-                    </a:lnL>
-                    <a:lnR w="12700" cap="flat" cmpd="sng" algn="ctr">
-                      <a:noFill/>
-                      <a:prstDash val="solid"/>
-                      <a:round/>
-                      <a:headEnd type="none" w="med" len="med"/>
-                      <a:tailEnd type="none" w="med" len="med"/>
-                    </a:lnR>
-                    <a:lnT w="12700" cap="flat" cmpd="sng" algn="ctr">
-                      <a:solidFill>
-                        <a:srgbClr val="D7D7D7"/>
-                      </a:solidFill>
-                      <a:prstDash val="solid"/>
-                      <a:round/>
-                      <a:headEnd type="none" w="med" len="med"/>
-                      <a:tailEnd type="none" w="med" len="med"/>
-                    </a:lnT>
-                    <a:lnB w="12700" cap="flat" cmpd="sng" algn="ctr">
-                      <a:noFill/>
-                      <a:prstDash val="solid"/>
-                      <a:round/>
-                      <a:headEnd type="none" w="med" len="med"/>
-                      <a:tailEnd type="none" w="med" len="med"/>
-                    </a:lnB>
-                    <a:lnTlToBr w="12700" cmpd="sng">
-                      <a:noFill/>
-                      <a:prstDash val="solid"/>
-                    </a:lnTlToBr>
-                    <a:lnBlToTr w="12700" cmpd="sng">
-                      <a:noFill/>
-                      <a:prstDash val="solid"/>
-                    </a:lnBlToTr>
-                    <a:solidFill>
-                      <a:schemeClr val="bg1"/>
-                    </a:solidFill>
-                  </a:tcPr>
-                </a:tc>
-                <a:extLst>
-                  <a:ext uri="{0D108BD9-81ED-4DB2-BD59-A6C34878D82A}">
-                    <a16:rowId xmlns:a16="http://schemas.microsoft.com/office/drawing/2014/main" xmlns="" val="1883885399"/>
-                  </a:ext>
-                </a:extLst>
-              </a:tr>
-            </a:tbl>
-          </a:graphicData>
-        </a:graphic>
-      </p:graphicFrame>
-      <p:graphicFrame>
-        <p:nvGraphicFramePr>
-          <p:cNvPr id="14" name="collective_themes"/>
-          <p:cNvGraphicFramePr>
-            <a:graphicFrameLocks noGrp="1"/>
-          </p:cNvGraphicFramePr>
-          <p:nvPr>
-            <p:extLst>
-              <p:ext uri="{D42A27DB-BD31-4B8C-83A1-F6EECF244321}">
-                <p14:modId xmlns:p14="http://schemas.microsoft.com/office/powerpoint/2010/main" val="3313594587"/>
-              </p:ext>
-            </p:extLst>
-          </p:nvPr>
-        </p:nvGraphicFramePr>
-        <p:xfrm>
-          <a:off x="142300" y="2882819"/>
-          <a:ext cx="11284155" cy="3690975"/>
-        </p:xfrm>
-        <a:graphic>
-          <a:graphicData uri="http://schemas.openxmlformats.org/drawingml/2006/table">
-            <a:tbl>
-              <a:tblPr/>
-              <a:tblGrid>
-                <a:gridCol w="3761385">
-                  <a:extLst>
-                    <a:ext uri="{9D8B030D-6E8A-4147-A177-3AD203B41FA5}">
-                      <a16:colId xmlns:a16="http://schemas.microsoft.com/office/drawing/2014/main" xmlns="" val="1646718413"/>
-                    </a:ext>
-                  </a:extLst>
-                </a:gridCol>
-                <a:gridCol w="3761385">
-                  <a:extLst>
-                    <a:ext uri="{9D8B030D-6E8A-4147-A177-3AD203B41FA5}">
-                      <a16:colId xmlns:a16="http://schemas.microsoft.com/office/drawing/2014/main" xmlns="" val="792188316"/>
-                    </a:ext>
-                  </a:extLst>
-                </a:gridCol>
-                <a:gridCol w="3761385">
-                  <a:extLst>
-                    <a:ext uri="{9D8B030D-6E8A-4147-A177-3AD203B41FA5}">
-                      <a16:colId xmlns:a16="http://schemas.microsoft.com/office/drawing/2014/main" xmlns="" val="1891943241"/>
-                    </a:ext>
-                  </a:extLst>
-                </a:gridCol>
-              </a:tblGrid>
-              <a:tr h="900759">
-                <a:tc gridSpan="3">
-                  <a:txBody>
-                    <a:bodyPr/>
-                    <a:lstStyle/>
-                    <a:p/>
-                  </a:txBody>
-                  <a:tcPr marL="6371" marR="6371" marT="6371" marB="0" anchor="ctr">
-                    <a:lnL w="12700" cap="flat" cmpd="sng" algn="ctr">
-                      <a:solidFill>
-                        <a:schemeClr val="bg1"/>
-                      </a:solidFill>
-                      <a:prstDash val="solid"/>
-                      <a:round/>
-                      <a:headEnd type="none" w="med" len="med"/>
-                      <a:tailEnd type="none" w="med" len="med"/>
-                    </a:lnL>
-                    <a:lnR w="12700" cap="flat" cmpd="sng" algn="ctr">
-                      <a:solidFill>
-                        <a:schemeClr val="bg1"/>
-                      </a:solidFill>
-                      <a:prstDash val="solid"/>
-                      <a:round/>
-                      <a:headEnd type="none" w="med" len="med"/>
-                      <a:tailEnd type="none" w="med" len="med"/>
-                    </a:lnR>
-                    <a:lnT w="12700" cap="flat" cmpd="sng" algn="ctr">
-                      <a:solidFill>
-                        <a:schemeClr val="bg1"/>
-                      </a:solidFill>
-                      <a:prstDash val="solid"/>
-                      <a:round/>
-                      <a:headEnd type="none" w="med" len="med"/>
-                      <a:tailEnd type="none" w="med" len="med"/>
-                    </a:lnT>
-                    <a:lnB w="12700" cap="flat" cmpd="sng" algn="ctr">
-                      <a:noFill/>
-                      <a:prstDash val="solid"/>
-                      <a:round/>
-                      <a:headEnd type="none" w="med" len="med"/>
-                      <a:tailEnd type="none" w="med" len="med"/>
-                    </a:lnB>
-                    <a:lnTlToBr w="12700" cmpd="sng">
-                      <a:noFill/>
-                      <a:prstDash val="solid"/>
-                    </a:lnTlToBr>
-                    <a:lnBlToTr w="12700" cmpd="sng">
-                      <a:noFill/>
-                      <a:prstDash val="solid"/>
-                    </a:lnBlToTr>
-                    <a:solidFill>
-                      <a:srgbClr val="67BAE7"/>
-                    </a:solidFill>
-                  </a:tcPr>
-                </a:tc>
-                <a:tc hMerge="1">
-                  <a:txBody>
-                    <a:bodyPr/>
-                    <a:lstStyle/>
-                    <a:p/>
-                  </a:txBody>
-                  <a:tcPr marL="6371" marR="6371" marT="6371" marB="0" anchor="ctr">
-                    <a:lnL w="12700" cap="flat" cmpd="sng" algn="ctr">
-                      <a:solidFill>
-                        <a:schemeClr val="bg1"/>
-                      </a:solidFill>
-                      <a:prstDash val="solid"/>
-                      <a:round/>
-                      <a:headEnd type="none" w="med" len="med"/>
-                      <a:tailEnd type="none" w="med" len="med"/>
-                    </a:lnL>
-                    <a:lnR w="12700" cap="flat" cmpd="sng" algn="ctr">
-                      <a:solidFill>
-                        <a:schemeClr val="bg1"/>
-                      </a:solidFill>
-                      <a:prstDash val="solid"/>
-                      <a:round/>
-                      <a:headEnd type="none" w="med" len="med"/>
-                      <a:tailEnd type="none" w="med" len="med"/>
-                    </a:lnR>
-                    <a:lnT w="12700" cap="flat" cmpd="sng" algn="ctr">
-                      <a:solidFill>
-                        <a:schemeClr val="bg1"/>
-                      </a:solidFill>
-                      <a:prstDash val="solid"/>
-                      <a:round/>
-                      <a:headEnd type="none" w="med" len="med"/>
-                      <a:tailEnd type="none" w="med" len="med"/>
-                    </a:lnT>
-                    <a:lnB w="12700" cap="flat" cmpd="sng" algn="ctr">
-                      <a:solidFill>
-                        <a:schemeClr val="bg1"/>
-                      </a:solidFill>
-                      <a:prstDash val="solid"/>
-                      <a:round/>
-                      <a:headEnd type="none" w="med" len="med"/>
-                      <a:tailEnd type="none" w="med" len="med"/>
-                    </a:lnB>
-                    <a:lnTlToBr w="12700" cmpd="sng">
-                      <a:noFill/>
-                      <a:prstDash val="solid"/>
-                    </a:lnTlToBr>
-                    <a:lnBlToTr w="12700" cmpd="sng">
-                      <a:noFill/>
-                      <a:prstDash val="solid"/>
-                    </a:lnBlToTr>
-                    <a:solidFill>
-                      <a:srgbClr val="67BAE7"/>
-                    </a:solidFill>
-                  </a:tcPr>
-                </a:tc>
-                <a:tc hMerge="1">
-                  <a:txBody>
-                    <a:bodyPr/>
-                    <a:lstStyle/>
-                    <a:p/>
-                  </a:txBody>
-                  <a:tcPr marL="6371" marR="6371" marT="6371" marB="0" anchor="ctr">
-                    <a:lnL w="12700" cap="flat" cmpd="sng" algn="ctr">
-                      <a:solidFill>
-                        <a:schemeClr val="bg1"/>
-                      </a:solidFill>
-                      <a:prstDash val="solid"/>
-                      <a:round/>
-                      <a:headEnd type="none" w="med" len="med"/>
-                      <a:tailEnd type="none" w="med" len="med"/>
-                    </a:lnL>
-                    <a:lnR w="12700" cap="flat" cmpd="sng" algn="ctr">
-                      <a:solidFill>
-                        <a:schemeClr val="bg1"/>
-                      </a:solidFill>
-                      <a:prstDash val="solid"/>
-                      <a:round/>
-                      <a:headEnd type="none" w="med" len="med"/>
-                      <a:tailEnd type="none" w="med" len="med"/>
-                    </a:lnR>
-                    <a:lnT w="12700" cap="flat" cmpd="sng" algn="ctr">
-                      <a:solidFill>
-                        <a:schemeClr val="bg1"/>
-                      </a:solidFill>
-                      <a:prstDash val="solid"/>
-                      <a:round/>
-                      <a:headEnd type="none" w="med" len="med"/>
-                      <a:tailEnd type="none" w="med" len="med"/>
-                    </a:lnT>
-                    <a:lnB w="12700" cap="flat" cmpd="sng" algn="ctr">
-                      <a:solidFill>
-                        <a:schemeClr val="bg1"/>
-                      </a:solidFill>
-                      <a:prstDash val="solid"/>
-                      <a:round/>
-                      <a:headEnd type="none" w="med" len="med"/>
-                      <a:tailEnd type="none" w="med" len="med"/>
-                    </a:lnB>
-                    <a:lnTlToBr w="12700" cmpd="sng">
-                      <a:noFill/>
-                      <a:prstDash val="solid"/>
-                    </a:lnTlToBr>
-                    <a:lnBlToTr w="12700" cmpd="sng">
-                      <a:noFill/>
-                      <a:prstDash val="solid"/>
-                    </a:lnBlToTr>
-                    <a:solidFill>
-                      <a:srgbClr val="67BAE7"/>
-                    </a:solidFill>
-                  </a:tcPr>
-                </a:tc>
-                <a:extLst>
-                  <a:ext uri="{0D108BD9-81ED-4DB2-BD59-A6C34878D82A}">
-                    <a16:rowId xmlns:a16="http://schemas.microsoft.com/office/drawing/2014/main" xmlns="" val="2066328557"/>
-                  </a:ext>
-                </a:extLst>
-              </a:tr>
-              <a:tr h="930072">
-                <a:tc>
-                  <a:txBody>
-                    <a:bodyPr/>
-                    <a:lstStyle/>
-                    <a:p/>
-                  </a:txBody>
-                  <a:tcPr anchor="ctr">
-                    <a:lnL w="12700" cap="flat" cmpd="sng" algn="ctr">
-                      <a:noFill/>
-                      <a:prstDash val="solid"/>
-                      <a:round/>
-                      <a:headEnd type="none" w="med" len="med"/>
-                      <a:tailEnd type="none" w="med" len="med"/>
-                    </a:lnL>
-                    <a:lnR w="12700" cap="flat" cmpd="sng" algn="ctr">
-                      <a:solidFill>
-                        <a:srgbClr val="D7D7D7"/>
-                      </a:solidFill>
-                      <a:prstDash val="solid"/>
-                      <a:round/>
-                      <a:headEnd type="none" w="med" len="med"/>
-                      <a:tailEnd type="none" w="med" len="med"/>
-                    </a:lnR>
-                    <a:lnT w="12700" cap="flat" cmpd="sng" algn="ctr">
-                      <a:noFill/>
-                      <a:prstDash val="solid"/>
-                      <a:round/>
-                      <a:headEnd type="none" w="med" len="med"/>
-                      <a:tailEnd type="none" w="med" len="med"/>
-                    </a:lnT>
-                    <a:lnB w="12700" cap="flat" cmpd="sng" algn="ctr">
-                      <a:solidFill>
-                        <a:srgbClr val="D7D7D7"/>
-                      </a:solidFill>
-                      <a:prstDash val="solid"/>
-                      <a:round/>
-                      <a:headEnd type="none" w="med" len="med"/>
-                      <a:tailEnd type="none" w="med" len="med"/>
-                    </a:lnB>
-                    <a:lnTlToBr w="12700" cmpd="sng">
-                      <a:noFill/>
-                      <a:prstDash val="solid"/>
-                    </a:lnTlToBr>
-                    <a:lnBlToTr w="12700" cmpd="sng">
-                      <a:noFill/>
-                      <a:prstDash val="solid"/>
-                    </a:lnBlToTr>
-                    <a:solidFill>
-                      <a:schemeClr val="bg1"/>
-                    </a:solidFill>
-                  </a:tcPr>
-                </a:tc>
-                <a:tc>
-                  <a:txBody>
-                    <a:bodyPr/>
-                    <a:lstStyle/>
-                    <a:p/>
-                  </a:txBody>
-                  <a:tcPr anchor="ctr">
-                    <a:lnL w="12700" cap="flat" cmpd="sng" algn="ctr">
-                      <a:solidFill>
-                        <a:srgbClr val="D7D7D7"/>
-                      </a:solidFill>
-                      <a:prstDash val="solid"/>
-                      <a:round/>
-                      <a:headEnd type="none" w="med" len="med"/>
-                      <a:tailEnd type="none" w="med" len="med"/>
-                    </a:lnL>
-                    <a:lnR w="12700" cap="flat" cmpd="sng" algn="ctr">
-                      <a:solidFill>
-                        <a:srgbClr val="D7D7D7"/>
-                      </a:solidFill>
-                      <a:prstDash val="solid"/>
-                      <a:round/>
-                      <a:headEnd type="none" w="med" len="med"/>
-                      <a:tailEnd type="none" w="med" len="med"/>
-                    </a:lnR>
-                    <a:lnT w="12700" cap="flat" cmpd="sng" algn="ctr">
-                      <a:noFill/>
-                      <a:prstDash val="solid"/>
-                      <a:round/>
-                      <a:headEnd type="none" w="med" len="med"/>
-                      <a:tailEnd type="none" w="med" len="med"/>
-                    </a:lnT>
-                    <a:lnB w="12700" cap="flat" cmpd="sng" algn="ctr">
-                      <a:solidFill>
-                        <a:srgbClr val="D7D7D7"/>
-                      </a:solidFill>
-                      <a:prstDash val="solid"/>
-                      <a:round/>
-                      <a:headEnd type="none" w="med" len="med"/>
-                      <a:tailEnd type="none" w="med" len="med"/>
-                    </a:lnB>
-                    <a:lnTlToBr w="12700" cmpd="sng">
-                      <a:noFill/>
-                      <a:prstDash val="solid"/>
-                    </a:lnTlToBr>
-                    <a:lnBlToTr w="12700" cmpd="sng">
-                      <a:noFill/>
-                      <a:prstDash val="solid"/>
-                    </a:lnBlToTr>
-                    <a:solidFill>
-                      <a:schemeClr val="bg1"/>
-                    </a:solidFill>
-                  </a:tcPr>
-                </a:tc>
-                <a:tc>
-                  <a:txBody>
-                    <a:bodyPr/>
-                    <a:lstStyle/>
-                    <a:p/>
-                  </a:txBody>
-                  <a:tcPr anchor="ctr">
-                    <a:lnL w="12700" cap="flat" cmpd="sng" algn="ctr">
-                      <a:solidFill>
-                        <a:srgbClr val="D7D7D7"/>
-                      </a:solidFill>
-                      <a:prstDash val="solid"/>
-                      <a:round/>
-                      <a:headEnd type="none" w="med" len="med"/>
-                      <a:tailEnd type="none" w="med" len="med"/>
-                    </a:lnL>
-                    <a:lnR w="12700" cap="flat" cmpd="sng" algn="ctr">
-                      <a:noFill/>
-                      <a:prstDash val="solid"/>
-                      <a:round/>
-                      <a:headEnd type="none" w="med" len="med"/>
-                      <a:tailEnd type="none" w="med" len="med"/>
-                    </a:lnR>
-                    <a:lnT w="12700" cap="flat" cmpd="sng" algn="ctr">
-                      <a:noFill/>
-                      <a:prstDash val="solid"/>
-                      <a:round/>
-                      <a:headEnd type="none" w="med" len="med"/>
-                      <a:tailEnd type="none" w="med" len="med"/>
-                    </a:lnT>
-                    <a:lnB w="12700" cap="flat" cmpd="sng" algn="ctr">
-                      <a:solidFill>
-                        <a:srgbClr val="D7D7D7"/>
-                      </a:solidFill>
-                      <a:prstDash val="solid"/>
-                      <a:round/>
-                      <a:headEnd type="none" w="med" len="med"/>
-                      <a:tailEnd type="none" w="med" len="med"/>
-                    </a:lnB>
-                    <a:lnTlToBr w="12700" cmpd="sng">
-                      <a:noFill/>
-                      <a:prstDash val="solid"/>
-                    </a:lnTlToBr>
-                    <a:lnBlToTr w="12700" cmpd="sng">
-                      <a:noFill/>
-                      <a:prstDash val="solid"/>
-                    </a:lnBlToTr>
-                    <a:solidFill>
-                      <a:schemeClr val="bg1"/>
-                    </a:solidFill>
-                  </a:tcPr>
-                </a:tc>
-                <a:extLst>
-                  <a:ext uri="{0D108BD9-81ED-4DB2-BD59-A6C34878D82A}">
-                    <a16:rowId xmlns:a16="http://schemas.microsoft.com/office/drawing/2014/main" xmlns="" val="1507558984"/>
-                  </a:ext>
-                </a:extLst>
-              </a:tr>
-              <a:tr h="930072">
-                <a:tc>
-                  <a:txBody>
-                    <a:bodyPr/>
-                    <a:lstStyle/>
-                    <a:p/>
-                  </a:txBody>
-                  <a:tcPr anchor="ctr">
-                    <a:lnL w="12700" cap="flat" cmpd="sng" algn="ctr">
-                      <a:noFill/>
-                      <a:prstDash val="solid"/>
-                      <a:round/>
-                      <a:headEnd type="none" w="med" len="med"/>
-                      <a:tailEnd type="none" w="med" len="med"/>
-                    </a:lnL>
-                    <a:lnR w="12700" cap="flat" cmpd="sng" algn="ctr">
-                      <a:solidFill>
-                        <a:srgbClr val="D7D7D7"/>
-                      </a:solidFill>
-                      <a:prstDash val="solid"/>
-                      <a:round/>
-                      <a:headEnd type="none" w="med" len="med"/>
-                      <a:tailEnd type="none" w="med" len="med"/>
-                    </a:lnR>
-                    <a:lnT w="12700" cap="flat" cmpd="sng" algn="ctr">
-                      <a:solidFill>
-                        <a:srgbClr val="D7D7D7"/>
-                      </a:solidFill>
-                      <a:prstDash val="solid"/>
-                      <a:round/>
-                      <a:headEnd type="none" w="med" len="med"/>
-                      <a:tailEnd type="none" w="med" len="med"/>
-                    </a:lnT>
-                    <a:lnB w="12700" cap="flat" cmpd="sng" algn="ctr">
-                      <a:solidFill>
-                        <a:srgbClr val="D7D7D7"/>
-                      </a:solidFill>
-                      <a:prstDash val="solid"/>
-                      <a:round/>
-                      <a:headEnd type="none" w="med" len="med"/>
-                      <a:tailEnd type="none" w="med" len="med"/>
-                    </a:lnB>
-                    <a:lnTlToBr w="12700" cmpd="sng">
-                      <a:noFill/>
-                      <a:prstDash val="solid"/>
-                    </a:lnTlToBr>
-                    <a:lnBlToTr w="12700" cmpd="sng">
-                      <a:noFill/>
-                      <a:prstDash val="solid"/>
-                    </a:lnBlToTr>
-                    <a:solidFill>
-                      <a:schemeClr val="bg1"/>
-                    </a:solidFill>
-                  </a:tcPr>
-                </a:tc>
-                <a:tc>
-                  <a:txBody>
-                    <a:bodyPr/>
-                    <a:lstStyle/>
-                    <a:p/>
-                  </a:txBody>
-                  <a:tcPr anchor="ctr">
-                    <a:lnL w="12700" cap="flat" cmpd="sng" algn="ctr">
-                      <a:solidFill>
-                        <a:srgbClr val="D7D7D7"/>
-                      </a:solidFill>
-                      <a:prstDash val="solid"/>
-                      <a:round/>
-                      <a:headEnd type="none" w="med" len="med"/>
-                      <a:tailEnd type="none" w="med" len="med"/>
-                    </a:lnL>
-                    <a:lnR w="12700" cap="flat" cmpd="sng" algn="ctr">
-                      <a:solidFill>
-                        <a:srgbClr val="D7D7D7"/>
-                      </a:solidFill>
-                      <a:prstDash val="solid"/>
-                      <a:round/>
-                      <a:headEnd type="none" w="med" len="med"/>
-                      <a:tailEnd type="none" w="med" len="med"/>
-                    </a:lnR>
-                    <a:lnT w="12700" cap="flat" cmpd="sng" algn="ctr">
-                      <a:solidFill>
-                        <a:srgbClr val="D7D7D7"/>
-                      </a:solidFill>
-                      <a:prstDash val="solid"/>
-                      <a:round/>
-                      <a:headEnd type="none" w="med" len="med"/>
-                      <a:tailEnd type="none" w="med" len="med"/>
-                    </a:lnT>
-                    <a:lnB w="12700" cap="flat" cmpd="sng" algn="ctr">
-                      <a:solidFill>
-                        <a:srgbClr val="D7D7D7"/>
-                      </a:solidFill>
-                      <a:prstDash val="solid"/>
-                      <a:round/>
-                      <a:headEnd type="none" w="med" len="med"/>
-                      <a:tailEnd type="none" w="med" len="med"/>
-                    </a:lnB>
-                    <a:lnTlToBr w="12700" cmpd="sng">
-                      <a:noFill/>
-                      <a:prstDash val="solid"/>
-                    </a:lnTlToBr>
-                    <a:lnBlToTr w="12700" cmpd="sng">
-                      <a:noFill/>
-                      <a:prstDash val="solid"/>
-                    </a:lnBlToTr>
-                    <a:solidFill>
-                      <a:schemeClr val="bg1"/>
-                    </a:solidFill>
-                  </a:tcPr>
-                </a:tc>
-                <a:tc>
-                  <a:txBody>
-                    <a:bodyPr/>
-                    <a:lstStyle/>
-                    <a:p/>
-                  </a:txBody>
-                  <a:tcPr anchor="ctr">
-                    <a:lnL w="12700" cap="flat" cmpd="sng" algn="ctr">
-                      <a:solidFill>
-                        <a:srgbClr val="D7D7D7"/>
-                      </a:solidFill>
-                      <a:prstDash val="solid"/>
-                      <a:round/>
-                      <a:headEnd type="none" w="med" len="med"/>
-                      <a:tailEnd type="none" w="med" len="med"/>
-                    </a:lnL>
-                    <a:lnR w="12700" cap="flat" cmpd="sng" algn="ctr">
-                      <a:noFill/>
-                      <a:prstDash val="solid"/>
-                      <a:round/>
-                      <a:headEnd type="none" w="med" len="med"/>
-                      <a:tailEnd type="none" w="med" len="med"/>
-                    </a:lnR>
-                    <a:lnT w="12700" cap="flat" cmpd="sng" algn="ctr">
-                      <a:solidFill>
-                        <a:srgbClr val="D7D7D7"/>
-                      </a:solidFill>
-                      <a:prstDash val="solid"/>
-                      <a:round/>
-                      <a:headEnd type="none" w="med" len="med"/>
-                      <a:tailEnd type="none" w="med" len="med"/>
-                    </a:lnT>
-                    <a:lnB w="12700" cap="flat" cmpd="sng" algn="ctr">
-                      <a:solidFill>
-                        <a:srgbClr val="D7D7D7"/>
-                      </a:solidFill>
-                      <a:prstDash val="solid"/>
-                      <a:round/>
-                      <a:headEnd type="none" w="med" len="med"/>
-                      <a:tailEnd type="none" w="med" len="med"/>
-                    </a:lnB>
-                    <a:lnTlToBr w="12700" cmpd="sng">
-                      <a:noFill/>
-                      <a:prstDash val="solid"/>
-                    </a:lnTlToBr>
-                    <a:lnBlToTr w="12700" cmpd="sng">
-                      <a:noFill/>
-                      <a:prstDash val="solid"/>
-                    </a:lnBlToTr>
-                    <a:solidFill>
-                      <a:schemeClr val="bg1"/>
-                    </a:solidFill>
-                  </a:tcPr>
-                </a:tc>
-                <a:extLst>
-                  <a:ext uri="{0D108BD9-81ED-4DB2-BD59-A6C34878D82A}">
-                    <a16:rowId xmlns:a16="http://schemas.microsoft.com/office/drawing/2014/main" xmlns="" val="1883885399"/>
-                  </a:ext>
-                </a:extLst>
-              </a:tr>
-              <a:tr h="930072">
-                <a:tc>
-                  <a:txBody>
-                    <a:bodyPr/>
-                    <a:lstStyle/>
-                    <a:p/>
-                  </a:txBody>
-                  <a:tcPr anchor="ctr">
-                    <a:lnL w="12700" cap="flat" cmpd="sng" algn="ctr">
-                      <a:noFill/>
-                      <a:prstDash val="solid"/>
-                      <a:round/>
-                      <a:headEnd type="none" w="med" len="med"/>
-                      <a:tailEnd type="none" w="med" len="med"/>
-                    </a:lnL>
-                    <a:lnR w="12700" cap="flat" cmpd="sng" algn="ctr">
-                      <a:solidFill>
-                        <a:srgbClr val="D7D7D7"/>
-                      </a:solidFill>
-                      <a:prstDash val="solid"/>
-                      <a:round/>
-                      <a:headEnd type="none" w="med" len="med"/>
-                      <a:tailEnd type="none" w="med" len="med"/>
-                    </a:lnR>
-                    <a:lnT w="12700" cap="flat" cmpd="sng" algn="ctr">
-                      <a:solidFill>
-                        <a:srgbClr val="D7D7D7"/>
-                      </a:solidFill>
-                      <a:prstDash val="solid"/>
-                      <a:round/>
-                      <a:headEnd type="none" w="med" len="med"/>
-                      <a:tailEnd type="none" w="med" len="med"/>
-                    </a:lnT>
-                    <a:lnB w="12700" cap="flat" cmpd="sng" algn="ctr">
-                      <a:noFill/>
-                      <a:prstDash val="solid"/>
-                      <a:round/>
-                      <a:headEnd type="none" w="med" len="med"/>
-                      <a:tailEnd type="none" w="med" len="med"/>
-                    </a:lnB>
-                    <a:lnTlToBr w="12700" cmpd="sng">
-                      <a:noFill/>
-                      <a:prstDash val="solid"/>
-                    </a:lnTlToBr>
-                    <a:lnBlToTr w="12700" cmpd="sng">
-                      <a:noFill/>
-                      <a:prstDash val="solid"/>
-                    </a:lnBlToTr>
-                    <a:solidFill>
-                      <a:schemeClr val="bg1"/>
-                    </a:solidFill>
-                  </a:tcPr>
-                </a:tc>
-                <a:tc>
-                  <a:txBody>
-                    <a:bodyPr/>
-                    <a:lstStyle/>
-                    <a:p/>
-                  </a:txBody>
-                  <a:tcPr anchor="ctr">
-                    <a:lnL w="12700" cap="flat" cmpd="sng" algn="ctr">
-                      <a:solidFill>
-                        <a:srgbClr val="D7D7D7"/>
-                      </a:solidFill>
-                      <a:prstDash val="solid"/>
-                      <a:round/>
-                      <a:headEnd type="none" w="med" len="med"/>
-                      <a:tailEnd type="none" w="med" len="med"/>
-                    </a:lnL>
-                    <a:lnR w="12700" cap="flat" cmpd="sng" algn="ctr">
-                      <a:solidFill>
-                        <a:srgbClr val="D7D7D7"/>
-                      </a:solidFill>
-                      <a:prstDash val="solid"/>
-                      <a:round/>
-                      <a:headEnd type="none" w="med" len="med"/>
-                      <a:tailEnd type="none" w="med" len="med"/>
-                    </a:lnR>
-                    <a:lnT w="12700" cap="flat" cmpd="sng" algn="ctr">
-                      <a:solidFill>
-                        <a:srgbClr val="D7D7D7"/>
-                      </a:solidFill>
-                      <a:prstDash val="solid"/>
-                      <a:round/>
-                      <a:headEnd type="none" w="med" len="med"/>
-                      <a:tailEnd type="none" w="med" len="med"/>
-                    </a:lnT>
-                    <a:lnB w="12700" cap="flat" cmpd="sng" algn="ctr">
-                      <a:noFill/>
-                      <a:prstDash val="solid"/>
-                      <a:round/>
-                      <a:headEnd type="none" w="med" len="med"/>
-                      <a:tailEnd type="none" w="med" len="med"/>
-                    </a:lnB>
-                    <a:lnTlToBr w="12700" cmpd="sng">
-                      <a:noFill/>
-                      <a:prstDash val="solid"/>
-                    </a:lnTlToBr>
-                    <a:lnBlToTr w="12700" cmpd="sng">
-                      <a:noFill/>
-                      <a:prstDash val="solid"/>
-                    </a:lnBlToTr>
-                    <a:solidFill>
-                      <a:schemeClr val="bg1"/>
-                    </a:solidFill>
-                  </a:tcPr>
-                </a:tc>
-                <a:tc>
-                  <a:txBody>
-                    <a:bodyPr/>
-                    <a:lstStyle/>
-                    <a:p/>
-                  </a:txBody>
-                  <a:tcPr anchor="ctr">
-                    <a:lnL w="12700" cap="flat" cmpd="sng" algn="ctr">
-                      <a:solidFill>
-                        <a:srgbClr val="D7D7D7"/>
-                      </a:solidFill>
-                      <a:prstDash val="solid"/>
-                      <a:round/>
-                      <a:headEnd type="none" w="med" len="med"/>
-                      <a:tailEnd type="none" w="med" len="med"/>
-                    </a:lnL>
-                    <a:lnR w="12700" cap="flat" cmpd="sng" algn="ctr">
-                      <a:noFill/>
-                      <a:prstDash val="solid"/>
-                      <a:round/>
-                      <a:headEnd type="none" w="med" len="med"/>
-                      <a:tailEnd type="none" w="med" len="med"/>
-                    </a:lnR>
-                    <a:lnT w="12700" cap="flat" cmpd="sng" algn="ctr">
-                      <a:solidFill>
-                        <a:srgbClr val="D7D7D7"/>
-                      </a:solidFill>
-                      <a:prstDash val="solid"/>
-                      <a:round/>
-                      <a:headEnd type="none" w="med" len="med"/>
-                      <a:tailEnd type="none" w="med" len="med"/>
-                    </a:lnT>
-                    <a:lnB w="12700" cap="flat" cmpd="sng" algn="ctr">
-                      <a:noFill/>
-                      <a:prstDash val="solid"/>
-                      <a:round/>
-                      <a:headEnd type="none" w="med" len="med"/>
-                      <a:tailEnd type="none" w="med" len="med"/>
-                    </a:lnB>
-                    <a:lnTlToBr w="12700" cmpd="sng">
-                      <a:noFill/>
-                      <a:prstDash val="solid"/>
-                    </a:lnTlToBr>
-                    <a:lnBlToTr w="12700" cmpd="sng">
-                      <a:noFill/>
-                      <a:prstDash val="solid"/>
-                    </a:lnBlToTr>
-                    <a:solidFill>
-                      <a:schemeClr val="bg1"/>
-                    </a:solidFill>
-                  </a:tcPr>
-                </a:tc>
-                <a:extLst>
-                  <a:ext uri="{0D108BD9-81ED-4DB2-BD59-A6C34878D82A}">
-                    <a16:rowId xmlns:a16="http://schemas.microsoft.com/office/drawing/2014/main" xmlns="" val="657021450"/>
-                  </a:ext>
-                </a:extLst>
-              </a:tr>
-            </a:tbl>
-          </a:graphicData>
-        </a:graphic>
-      </p:graphicFrame>
-    </p:spTree>
-    <p:extLst>
-      <p:ext uri="{BB962C8B-B14F-4D97-AF65-F5344CB8AC3E}">
-        <p14:creationId xmlns:p14="http://schemas.microsoft.com/office/powerpoint/2010/main" val="3548403830"/>
-      </p:ext>
-    </p:extLst>
-  </p:cSld>
-  <p:clrMapOvr>
-    <a:masterClrMapping/>
-  </p:clrMapOvr>
-  <p:timing>
-    <p:tnLst>
-      <p:par>
-        <p:cTn id="1" dur="indefinite" restart="never" nodeType="tmRoot"/>
-      </p:par>
-    </p:tnLst>
-  </p:timing>
-</p:sld>
-</file>
-
-<file path=ppt/slides/slide3.xml><?xml version="1.0" encoding="utf-8"?>
-<p:sld xmlns:a="http://schemas.openxmlformats.org/drawingml/2006/main" xmlns:r="http://schemas.openxmlformats.org/officeDocument/2006/relationships" xmlns:p="http://schemas.openxmlformats.org/presentationml/2006/main">
-  <p:cSld>
-    <p:spTree>
-      <p:nvGrpSpPr>
-        <p:cNvPr id="1" name=""/>
-        <p:cNvGrpSpPr/>
-        <p:nvPr/>
-      </p:nvGrpSpPr>
-      <p:grpSpPr>
-        <a:xfrm>
-          <a:off x="0" y="0"/>
-          <a:ext cx="0" cy="0"/>
-          <a:chOff x="0" y="0"/>
-          <a:chExt cx="0" cy="0"/>
-        </a:xfrm>
-      </p:grpSpPr>
-      <p:graphicFrame>
-        <p:nvGraphicFramePr>
-          <p:cNvPr id="55" name="collective_rows"/>
-          <p:cNvGraphicFramePr/>
-          <p:nvPr>
-            <p:extLst>
-              <p:ext uri="{D42A27DB-BD31-4B8C-83A1-F6EECF244321}">
-                <p14:modId xmlns:p14="http://schemas.microsoft.com/office/powerpoint/2010/main" val="4134327109"/>
-              </p:ext>
-            </p:extLst>
-          </p:nvPr>
-        </p:nvGraphicFramePr>
-        <p:xfrm>
-          <a:off x="77674" y="105438"/>
-          <a:ext cx="11311069" cy="6610851"/>
-        </p:xfrm>
-        <a:graphic>
-          <a:graphicData uri="http://schemas.openxmlformats.org/drawingml/2006/table">
-            <a:tbl>
-              <a:tblPr/>
-              <a:tblGrid>
-                <a:gridCol w="1260675">
-                  <a:extLst>
-                    <a:ext uri="{9D8B030D-6E8A-4147-A177-3AD203B41FA5}">
-                      <a16:colId xmlns:a16="http://schemas.microsoft.com/office/drawing/2014/main" xmlns="" val="20000"/>
-                    </a:ext>
-                  </a:extLst>
-                </a:gridCol>
-                <a:gridCol w="881149">
-                  <a:extLst>
-                    <a:ext uri="{9D8B030D-6E8A-4147-A177-3AD203B41FA5}">
-                      <a16:colId xmlns:a16="http://schemas.microsoft.com/office/drawing/2014/main" xmlns="" val="388146153"/>
-                    </a:ext>
-                  </a:extLst>
-                </a:gridCol>
-                <a:gridCol w="2930472">
-                  <a:extLst>
-                    <a:ext uri="{9D8B030D-6E8A-4147-A177-3AD203B41FA5}">
-                      <a16:colId xmlns:a16="http://schemas.microsoft.com/office/drawing/2014/main" xmlns="" val="20002"/>
-                    </a:ext>
-                  </a:extLst>
-                </a:gridCol>
-                <a:gridCol w="6238773">
-                  <a:extLst>
-                    <a:ext uri="{9D8B030D-6E8A-4147-A177-3AD203B41FA5}">
-                      <a16:colId xmlns:a16="http://schemas.microsoft.com/office/drawing/2014/main" xmlns="" val="20003"/>
-                    </a:ext>
-                  </a:extLst>
-                </a:gridCol>
-              </a:tblGrid>
-              <a:tr h="279890">
-                <a:tc>
-                  <a:txBody>
-                    <a:bodyPr/>
-                    <a:lstStyle/>
-                    <a:p>
-                      <a:pPr algn="ctr" defTabSz="914400">
-                        <a:lnSpc>
-                          <a:spcPct val="100000"/>
-                        </a:lnSpc>
-                      </a:pPr>
-                      <a:r>
-                        <a:rPr lang="ru-RU" sz="1000" b="1" strike="noStrike" spc="-1" dirty="0">
-                          <a:solidFill>
-                            <a:schemeClr val="bg1"/>
-                          </a:solidFill>
-                          <a:latin typeface="Arial" panose="020B0604020202020204" pitchFamily="34" charset="0"/>
-                          <a:cs typeface="Arial" panose="020B0604020202020204" pitchFamily="34" charset="0"/>
-                        </a:rPr>
-                        <a:t>ОМСУ</a:t>
-                      </a:r>
-                      <a:endParaRPr lang="ru-RU" sz="1000" b="0" strike="noStrike" spc="-1" dirty="0">
-                        <a:solidFill>
-                          <a:schemeClr val="bg1"/>
-                        </a:solidFill>
-                        <a:latin typeface="Arial" panose="020B0604020202020204" pitchFamily="34" charset="0"/>
-                        <a:cs typeface="Arial" panose="020B0604020202020204" pitchFamily="34" charset="0"/>
-                      </a:endParaRPr>
-                    </a:p>
-                  </a:txBody>
-                  <a:tcPr anchor="ctr">
-                    <a:lnL w="12700" cap="flat" cmpd="sng" algn="ctr">
-                      <a:noFill/>
-                      <a:prstDash val="solid"/>
-                      <a:round/>
-                      <a:headEnd type="none" w="med" len="med"/>
-                      <a:tailEnd type="none" w="med" len="med"/>
-                    </a:lnL>
-                    <a:lnR w="12700" cap="flat" cmpd="sng" algn="ctr">
-                      <a:solidFill>
-                        <a:schemeClr val="tx2">
-                          <a:lumMod val="90000"/>
-                        </a:schemeClr>
-                      </a:solidFill>
-                      <a:prstDash val="solid"/>
-                      <a:round/>
-                      <a:headEnd type="none" w="med" len="med"/>
-                      <a:tailEnd type="none" w="med" len="med"/>
-                    </a:lnR>
-                    <a:lnT w="12700" cap="flat" cmpd="sng" algn="ctr">
-                      <a:noFill/>
-                      <a:prstDash val="solid"/>
-                      <a:round/>
-                      <a:headEnd type="none" w="med" len="med"/>
-                      <a:tailEnd type="none" w="med" len="med"/>
-                    </a:lnT>
-                    <a:lnB w="12700" cap="flat" cmpd="sng" algn="ctr">
-                      <a:solidFill>
-                        <a:schemeClr val="tx2">
-                          <a:lumMod val="90000"/>
-                        </a:schemeClr>
-                      </a:solidFill>
-                      <a:prstDash val="solid"/>
-                      <a:round/>
-                      <a:headEnd type="none" w="med" len="med"/>
-                      <a:tailEnd type="none" w="med" len="med"/>
-                    </a:lnB>
-                    <a:lnTlToBr w="12700" cmpd="sng">
-                      <a:noFill/>
-                      <a:prstDash val="solid"/>
-                    </a:lnTlToBr>
-                    <a:lnBlToTr w="12700" cmpd="sng">
-                      <a:noFill/>
-                      <a:prstDash val="solid"/>
-                    </a:lnBlToTr>
-                    <a:solidFill>
-                      <a:srgbClr val="67BAE7"/>
-                    </a:solidFill>
-                  </a:tcPr>
-                </a:tc>
-                <a:tc>
-                  <a:txBody>
-                    <a:bodyPr/>
-                    <a:lstStyle/>
-                    <a:p>
-                      <a:pPr algn="ctr" defTabSz="914400">
-                        <a:lnSpc>
-                          <a:spcPct val="100000"/>
-                        </a:lnSpc>
-                      </a:pPr>
-                      <a:r>
-                        <a:rPr lang="ru-RU" sz="1000" b="1" strike="noStrike" spc="-1" dirty="0">
-                          <a:solidFill>
-                            <a:schemeClr val="bg1"/>
-                          </a:solidFill>
-                          <a:latin typeface="Arial" panose="020B0604020202020204" pitchFamily="34" charset="0"/>
-                          <a:cs typeface="Arial" panose="020B0604020202020204" pitchFamily="34" charset="0"/>
-                        </a:rPr>
-                        <a:t>Подписей</a:t>
-                      </a:r>
-                    </a:p>
-                  </a:txBody>
-                  <a:tcPr anchor="ctr">
-                    <a:lnL w="12700" cap="flat" cmpd="sng" algn="ctr">
-                      <a:solidFill>
-                        <a:schemeClr val="tx2">
-                          <a:lumMod val="90000"/>
-                        </a:schemeClr>
-                      </a:solidFill>
-                      <a:prstDash val="solid"/>
-                      <a:round/>
-                      <a:headEnd type="none" w="med" len="med"/>
-                      <a:tailEnd type="none" w="med" len="med"/>
-                    </a:lnL>
-                    <a:lnR w="12700" cap="flat" cmpd="sng" algn="ctr">
-                      <a:solidFill>
-                        <a:schemeClr val="tx2">
-                          <a:lumMod val="90000"/>
-                        </a:schemeClr>
-                      </a:solidFill>
-                      <a:prstDash val="solid"/>
-                      <a:round/>
-                      <a:headEnd type="none" w="med" len="med"/>
-                      <a:tailEnd type="none" w="med" len="med"/>
-                    </a:lnR>
-                    <a:lnT w="12700" cap="flat" cmpd="sng" algn="ctr">
-                      <a:noFill/>
-                      <a:prstDash val="solid"/>
-                      <a:round/>
-                      <a:headEnd type="none" w="med" len="med"/>
-                      <a:tailEnd type="none" w="med" len="med"/>
-                    </a:lnT>
-                    <a:lnB w="12700" cap="flat" cmpd="sng" algn="ctr">
-                      <a:solidFill>
-                        <a:schemeClr val="tx2">
-                          <a:lumMod val="90000"/>
-                        </a:schemeClr>
-                      </a:solidFill>
-                      <a:prstDash val="solid"/>
-                      <a:round/>
-                      <a:headEnd type="none" w="med" len="med"/>
-                      <a:tailEnd type="none" w="med" len="med"/>
-                    </a:lnB>
-                    <a:lnTlToBr w="12700" cmpd="sng">
-                      <a:noFill/>
-                      <a:prstDash val="solid"/>
-                    </a:lnTlToBr>
-                    <a:lnBlToTr w="12700" cmpd="sng">
-                      <a:noFill/>
-                      <a:prstDash val="solid"/>
-                    </a:lnBlToTr>
-                    <a:solidFill>
-                      <a:srgbClr val="67BAE7"/>
-                    </a:solidFill>
-                  </a:tcPr>
-                </a:tc>
-                <a:tc>
-                  <a:txBody>
-                    <a:bodyPr/>
-                    <a:lstStyle/>
-                    <a:p>
-                      <a:pPr algn="ctr" defTabSz="914400">
-                        <a:lnSpc>
-                          <a:spcPct val="100000"/>
-                        </a:lnSpc>
-                      </a:pPr>
-                      <a:r>
-                        <a:rPr lang="ru-RU" sz="1000" b="1" strike="noStrike" spc="-1" dirty="0">
-                          <a:solidFill>
-                            <a:schemeClr val="bg1"/>
-                          </a:solidFill>
-                          <a:latin typeface="Arial" panose="020B0604020202020204" pitchFamily="34" charset="0"/>
-                          <a:ea typeface="Arial"/>
-                          <a:cs typeface="Arial" panose="020B0604020202020204" pitchFamily="34" charset="0"/>
-                        </a:rPr>
-                        <a:t>Краткое содержание</a:t>
-                      </a:r>
-                      <a:endParaRPr lang="ru-RU" sz="1000" b="0" strike="noStrike" spc="-1" dirty="0">
-                        <a:solidFill>
-                          <a:schemeClr val="bg1"/>
-                        </a:solidFill>
-                        <a:latin typeface="Arial" panose="020B0604020202020204" pitchFamily="34" charset="0"/>
-                        <a:cs typeface="Arial" panose="020B0604020202020204" pitchFamily="34" charset="0"/>
-                      </a:endParaRPr>
-                    </a:p>
-                  </a:txBody>
-                  <a:tcPr anchor="ctr">
-                    <a:lnL w="12700" cap="flat" cmpd="sng" algn="ctr">
-                      <a:solidFill>
-                        <a:schemeClr val="tx2">
-                          <a:lumMod val="90000"/>
-                        </a:schemeClr>
-                      </a:solidFill>
-                      <a:prstDash val="solid"/>
-                      <a:round/>
-                      <a:headEnd type="none" w="med" len="med"/>
-                      <a:tailEnd type="none" w="med" len="med"/>
-                    </a:lnL>
-                    <a:lnR w="12700" cap="flat" cmpd="sng" algn="ctr">
-                      <a:solidFill>
-                        <a:schemeClr val="tx2">
-                          <a:lumMod val="90000"/>
-                        </a:schemeClr>
-                      </a:solidFill>
-                      <a:prstDash val="solid"/>
-                      <a:round/>
-                      <a:headEnd type="none" w="med" len="med"/>
-                      <a:tailEnd type="none" w="med" len="med"/>
-                    </a:lnR>
-                    <a:lnT w="12700" cap="flat" cmpd="sng" algn="ctr">
-                      <a:noFill/>
-                      <a:prstDash val="solid"/>
-                      <a:round/>
-                      <a:headEnd type="none" w="med" len="med"/>
-                      <a:tailEnd type="none" w="med" len="med"/>
-                    </a:lnT>
-                    <a:lnB w="12700" cap="flat" cmpd="sng" algn="ctr">
-                      <a:solidFill>
-                        <a:schemeClr val="tx2">
-                          <a:lumMod val="90000"/>
-                        </a:schemeClr>
-                      </a:solidFill>
-                      <a:prstDash val="solid"/>
-                      <a:round/>
-                      <a:headEnd type="none" w="med" len="med"/>
-                      <a:tailEnd type="none" w="med" len="med"/>
-                    </a:lnB>
-                    <a:lnTlToBr w="12700" cmpd="sng">
-                      <a:noFill/>
-                      <a:prstDash val="solid"/>
-                    </a:lnTlToBr>
-                    <a:lnBlToTr w="12700" cmpd="sng">
-                      <a:noFill/>
-                      <a:prstDash val="solid"/>
-                    </a:lnBlToTr>
-                    <a:solidFill>
-                      <a:srgbClr val="67BAE7"/>
-                    </a:solidFill>
-                  </a:tcPr>
-                </a:tc>
-                <a:tc>
-                  <a:txBody>
-                    <a:bodyPr/>
-                    <a:lstStyle/>
-                    <a:p>
-                      <a:pPr algn="ctr" defTabSz="914400">
-                        <a:lnSpc>
-                          <a:spcPct val="100000"/>
-                        </a:lnSpc>
-                        <a:tabLst>
-                          <a:tab pos="0" algn="l"/>
-                        </a:tabLst>
-                      </a:pPr>
-                      <a:r>
-                        <a:rPr lang="ru-RU" sz="1000" b="1" strike="noStrike" spc="-1" dirty="0" smtClean="0">
-                          <a:solidFill>
-                            <a:schemeClr val="bg1"/>
-                          </a:solidFill>
-                          <a:latin typeface="Arial" panose="020B0604020202020204" pitchFamily="34" charset="0"/>
-                          <a:ea typeface="Arial"/>
-                          <a:cs typeface="Arial" panose="020B0604020202020204" pitchFamily="34" charset="0"/>
-                        </a:rPr>
-                        <a:t>Актуальный</a:t>
-                      </a:r>
-                      <a:r>
-                        <a:rPr lang="ru-RU" sz="1000" b="1" strike="noStrike" spc="-1" baseline="0" dirty="0" smtClean="0">
-                          <a:solidFill>
-                            <a:schemeClr val="bg1"/>
-                          </a:solidFill>
-                          <a:latin typeface="Arial" panose="020B0604020202020204" pitchFamily="34" charset="0"/>
-                          <a:ea typeface="Arial"/>
-                          <a:cs typeface="Arial" panose="020B0604020202020204" pitchFamily="34" charset="0"/>
-                        </a:rPr>
-                        <a:t> с</a:t>
-                      </a:r>
-                      <a:r>
-                        <a:rPr lang="ru-RU" sz="1000" b="1" strike="noStrike" spc="-1" dirty="0" smtClean="0">
-                          <a:solidFill>
-                            <a:schemeClr val="bg1"/>
-                          </a:solidFill>
-                          <a:latin typeface="Arial" panose="020B0604020202020204" pitchFamily="34" charset="0"/>
-                          <a:ea typeface="Arial"/>
-                          <a:cs typeface="Arial" panose="020B0604020202020204" pitchFamily="34" charset="0"/>
-                        </a:rPr>
-                        <a:t>татус</a:t>
-                      </a:r>
-                      <a:endParaRPr lang="ru-RU" sz="1000" b="0" strike="noStrike" spc="-1" dirty="0">
-                        <a:solidFill>
-                          <a:schemeClr val="bg1"/>
-                        </a:solidFill>
-                        <a:latin typeface="Arial" panose="020B0604020202020204" pitchFamily="34" charset="0"/>
-                        <a:cs typeface="Arial" panose="020B0604020202020204" pitchFamily="34" charset="0"/>
-                      </a:endParaRPr>
-                    </a:p>
-                  </a:txBody>
-                  <a:tcPr anchor="ctr">
-                    <a:lnL w="12700" cap="flat" cmpd="sng" algn="ctr">
-                      <a:solidFill>
-                        <a:schemeClr val="tx2">
-                          <a:lumMod val="90000"/>
-                        </a:schemeClr>
-                      </a:solidFill>
-                      <a:prstDash val="solid"/>
-                      <a:round/>
-                      <a:headEnd type="none" w="med" len="med"/>
-                      <a:tailEnd type="none" w="med" len="med"/>
-                    </a:lnL>
-                    <a:lnR w="12700" cap="flat" cmpd="sng" algn="ctr">
-                      <a:noFill/>
-                      <a:prstDash val="solid"/>
-                      <a:round/>
-                      <a:headEnd type="none" w="med" len="med"/>
-                      <a:tailEnd type="none" w="med" len="med"/>
-                    </a:lnR>
-                    <a:lnT w="12700" cap="flat" cmpd="sng" algn="ctr">
-                      <a:noFill/>
-                      <a:prstDash val="solid"/>
-                      <a:round/>
-                      <a:headEnd type="none" w="med" len="med"/>
-                      <a:tailEnd type="none" w="med" len="med"/>
-                    </a:lnT>
-                    <a:lnB w="12700" cap="flat" cmpd="sng" algn="ctr">
-                      <a:solidFill>
-                        <a:schemeClr val="tx2">
-                          <a:lumMod val="90000"/>
-                        </a:schemeClr>
-                      </a:solidFill>
-                      <a:prstDash val="solid"/>
-                      <a:round/>
-                      <a:headEnd type="none" w="med" len="med"/>
-                      <a:tailEnd type="none" w="med" len="med"/>
-                    </a:lnB>
-                    <a:lnTlToBr w="12700" cmpd="sng">
-                      <a:noFill/>
-                      <a:prstDash val="solid"/>
-                    </a:lnTlToBr>
-                    <a:lnBlToTr w="12700" cmpd="sng">
-                      <a:noFill/>
-                      <a:prstDash val="solid"/>
-                    </a:lnBlToTr>
-                    <a:solidFill>
-                      <a:srgbClr val="67BAE7"/>
-                    </a:solidFill>
-                  </a:tcPr>
-                </a:tc>
-                <a:extLst>
-                  <a:ext uri="{0D108BD9-81ED-4DB2-BD59-A6C34878D82A}">
-                    <a16:rowId xmlns:a16="http://schemas.microsoft.com/office/drawing/2014/main" xmlns="" val="10000"/>
-                  </a:ext>
-                </a:extLst>
-              </a:tr>
-              <a:tr h="1340922">
-                <a:tc>
-                  <a:txBody>
-                    <a:bodyPr/>
-                    <a:lstStyle/>
-                    <a:p/>
-                  </a:txBody>
-                  <a:tcPr marL="7560" marR="7560" anchor="ctr">
-                    <a:lnL w="12700" cap="flat" cmpd="sng" algn="ctr">
-                      <a:noFill/>
-                      <a:prstDash val="solid"/>
-                      <a:round/>
-                      <a:headEnd type="none" w="med" len="med"/>
-                      <a:tailEnd type="none" w="med" len="med"/>
-                    </a:lnL>
-                    <a:lnR w="12700" cap="flat" cmpd="sng" algn="ctr">
-                      <a:solidFill>
-                        <a:schemeClr val="tx2">
-                          <a:lumMod val="90000"/>
-                        </a:schemeClr>
-                      </a:solidFill>
-                      <a:prstDash val="solid"/>
-                      <a:round/>
-                      <a:headEnd type="none" w="med" len="med"/>
-                      <a:tailEnd type="none" w="med" len="med"/>
-                    </a:lnR>
-                    <a:lnT w="12700" cap="flat" cmpd="sng" algn="ctr">
-                      <a:solidFill>
-                        <a:schemeClr val="tx2">
-                          <a:lumMod val="90000"/>
-                        </a:schemeClr>
-                      </a:solidFill>
-                      <a:prstDash val="solid"/>
-                      <a:round/>
-                      <a:headEnd type="none" w="med" len="med"/>
-                      <a:tailEnd type="none" w="med" len="med"/>
-                    </a:lnT>
-                    <a:lnB w="12700" cap="flat" cmpd="sng" algn="ctr">
-                      <a:solidFill>
-                        <a:schemeClr val="tx2">
-                          <a:lumMod val="90000"/>
-                        </a:schemeClr>
-                      </a:solidFill>
-                      <a:prstDash val="solid"/>
-                      <a:round/>
-                      <a:headEnd type="none" w="med" len="med"/>
-                      <a:tailEnd type="none" w="med" len="med"/>
-                    </a:lnB>
-                    <a:lnTlToBr w="12700" cmpd="sng">
-                      <a:noFill/>
-                      <a:prstDash val="solid"/>
-                    </a:lnTlToBr>
-                    <a:lnBlToTr w="12700" cmpd="sng">
-                      <a:noFill/>
-                      <a:prstDash val="solid"/>
-                    </a:lnBlToTr>
-                    <a:noFill/>
-                  </a:tcPr>
-                </a:tc>
-                <a:tc>
-                  <a:txBody>
-                    <a:bodyPr/>
-                    <a:lstStyle/>
-                    <a:p/>
-                  </a:txBody>
-                  <a:tcPr marL="9525" marR="9525" marT="9525" marB="0" anchor="ctr">
-                    <a:lnL w="12700" cap="flat" cmpd="sng" algn="ctr">
-                      <a:solidFill>
-                        <a:schemeClr val="tx2">
-                          <a:lumMod val="90000"/>
-                        </a:schemeClr>
-                      </a:solidFill>
-                      <a:prstDash val="solid"/>
-                      <a:round/>
-                      <a:headEnd type="none" w="med" len="med"/>
-                      <a:tailEnd type="none" w="med" len="med"/>
-                    </a:lnL>
-                    <a:lnR w="12700" cap="flat" cmpd="sng" algn="ctr">
-                      <a:solidFill>
-                        <a:schemeClr val="tx2">
-                          <a:lumMod val="90000"/>
-                        </a:schemeClr>
-                      </a:solidFill>
-                      <a:prstDash val="solid"/>
-                      <a:round/>
-                      <a:headEnd type="none" w="med" len="med"/>
-                      <a:tailEnd type="none" w="med" len="med"/>
-                    </a:lnR>
-                    <a:lnT w="12700" cap="flat" cmpd="sng" algn="ctr">
-                      <a:solidFill>
-                        <a:schemeClr val="tx2">
-                          <a:lumMod val="90000"/>
-                        </a:schemeClr>
-                      </a:solidFill>
-                      <a:prstDash val="solid"/>
-                      <a:round/>
-                      <a:headEnd type="none" w="med" len="med"/>
-                      <a:tailEnd type="none" w="med" len="med"/>
-                    </a:lnT>
-                    <a:lnB w="12700" cap="flat" cmpd="sng" algn="ctr">
-                      <a:solidFill>
-                        <a:schemeClr val="tx2">
-                          <a:lumMod val="90000"/>
-                        </a:schemeClr>
-                      </a:solidFill>
-                      <a:prstDash val="solid"/>
-                      <a:round/>
-                      <a:headEnd type="none" w="med" len="med"/>
-                      <a:tailEnd type="none" w="med" len="med"/>
-                    </a:lnB>
-                    <a:lnTlToBr w="12700" cmpd="sng">
-                      <a:noFill/>
-                      <a:prstDash val="solid"/>
-                    </a:lnTlToBr>
-                    <a:lnBlToTr w="12700" cmpd="sng">
-                      <a:noFill/>
-                      <a:prstDash val="solid"/>
-                    </a:lnBlToTr>
-                    <a:noFill/>
-                  </a:tcPr>
-                </a:tc>
-                <a:tc>
-                  <a:txBody>
-                    <a:bodyPr/>
-                    <a:lstStyle/>
-                    <a:p/>
-                  </a:txBody>
-                  <a:tcPr marL="72000" marR="72000" anchor="ctr">
-                    <a:lnL w="12700" cap="flat" cmpd="sng" algn="ctr">
-                      <a:solidFill>
-                        <a:schemeClr val="tx2">
-                          <a:lumMod val="90000"/>
-                        </a:schemeClr>
-                      </a:solidFill>
-                      <a:prstDash val="solid"/>
-                      <a:round/>
-                      <a:headEnd type="none" w="med" len="med"/>
-                      <a:tailEnd type="none" w="med" len="med"/>
-                    </a:lnL>
-                    <a:lnR w="12700" cap="flat" cmpd="sng" algn="ctr">
-                      <a:solidFill>
-                        <a:schemeClr val="tx2">
-                          <a:lumMod val="90000"/>
-                        </a:schemeClr>
-                      </a:solidFill>
-                      <a:prstDash val="solid"/>
-                      <a:round/>
-                      <a:headEnd type="none" w="med" len="med"/>
-                      <a:tailEnd type="none" w="med" len="med"/>
-                    </a:lnR>
-                    <a:lnT w="12700" cap="flat" cmpd="sng" algn="ctr">
-                      <a:solidFill>
-                        <a:schemeClr val="tx2">
-                          <a:lumMod val="90000"/>
-                        </a:schemeClr>
-                      </a:solidFill>
-                      <a:prstDash val="solid"/>
-                      <a:round/>
-                      <a:headEnd type="none" w="med" len="med"/>
-                      <a:tailEnd type="none" w="med" len="med"/>
-                    </a:lnT>
-                    <a:lnB w="12700" cap="flat" cmpd="sng" algn="ctr">
-                      <a:solidFill>
-                        <a:schemeClr val="tx2">
-                          <a:lumMod val="90000"/>
-                        </a:schemeClr>
-                      </a:solidFill>
-                      <a:prstDash val="solid"/>
-                      <a:round/>
-                      <a:headEnd type="none" w="med" len="med"/>
-                      <a:tailEnd type="none" w="med" len="med"/>
-                    </a:lnB>
-                    <a:lnTlToBr w="12700" cmpd="sng">
-                      <a:noFill/>
-                      <a:prstDash val="solid"/>
-                    </a:lnTlToBr>
-                    <a:lnBlToTr w="12700" cmpd="sng">
-                      <a:noFill/>
-                      <a:prstDash val="solid"/>
-                    </a:lnBlToTr>
-                    <a:noFill/>
-                  </a:tcPr>
-                </a:tc>
-                <a:tc>
-                  <a:txBody>
-                    <a:bodyPr/>
-                    <a:lstStyle/>
-                    <a:p/>
-                  </a:txBody>
-                  <a:tcPr marL="72000" marR="72000" anchor="ctr">
-                    <a:lnL w="12700" cap="flat" cmpd="sng" algn="ctr">
-                      <a:solidFill>
-                        <a:schemeClr val="tx2">
-                          <a:lumMod val="90000"/>
-                        </a:schemeClr>
-                      </a:solidFill>
-                      <a:prstDash val="solid"/>
-                      <a:round/>
-                      <a:headEnd type="none" w="med" len="med"/>
-                      <a:tailEnd type="none" w="med" len="med"/>
-                    </a:lnL>
-                    <a:lnR w="12700" cap="flat" cmpd="sng" algn="ctr">
-                      <a:noFill/>
-                      <a:prstDash val="solid"/>
-                      <a:round/>
-                      <a:headEnd type="none" w="med" len="med"/>
-                      <a:tailEnd type="none" w="med" len="med"/>
-                    </a:lnR>
-                    <a:lnT w="12700" cap="flat" cmpd="sng" algn="ctr">
-                      <a:solidFill>
-                        <a:schemeClr val="tx2">
-                          <a:lumMod val="90000"/>
-                        </a:schemeClr>
-                      </a:solidFill>
-                      <a:prstDash val="solid"/>
-                      <a:round/>
-                      <a:headEnd type="none" w="med" len="med"/>
-                      <a:tailEnd type="none" w="med" len="med"/>
-                    </a:lnT>
-                    <a:lnB w="12700" cap="flat" cmpd="sng" algn="ctr">
-                      <a:solidFill>
-                        <a:schemeClr val="tx2">
-                          <a:lumMod val="90000"/>
-                        </a:schemeClr>
-                      </a:solidFill>
-                      <a:prstDash val="solid"/>
-                      <a:round/>
-                      <a:headEnd type="none" w="med" len="med"/>
-                      <a:tailEnd type="none" w="med" len="med"/>
-                    </a:lnB>
-                    <a:lnTlToBr w="12700" cmpd="sng">
-                      <a:noFill/>
-                      <a:prstDash val="solid"/>
-                    </a:lnTlToBr>
-                    <a:lnBlToTr w="12700" cmpd="sng">
-                      <a:noFill/>
-                      <a:prstDash val="solid"/>
-                    </a:lnBlToTr>
-                    <a:noFill/>
-                  </a:tcPr>
-                </a:tc>
-                <a:extLst>
-                  <a:ext uri="{0D108BD9-81ED-4DB2-BD59-A6C34878D82A}">
-                    <a16:rowId xmlns:a16="http://schemas.microsoft.com/office/drawing/2014/main" xmlns="" val="10001"/>
-                  </a:ext>
-                </a:extLst>
-              </a:tr>
-            </a:tbl>
-          </a:graphicData>
-        </a:graphic>
-      </p:graphicFrame>
-      <p:sp>
-        <p:nvSpPr>
-          <p:cNvPr id="12" name="collective_page"/>
-          <p:cNvSpPr/>
-          <p:nvPr/>
-        </p:nvSpPr>
-        <p:spPr>
-          <a:xfrm>
-            <a:off x="11725258" y="6436422"/>
-            <a:ext cx="298480" cy="338554"/>
-          </a:xfrm>
-          <a:prstGeom prst="rect">
-            <a:avLst/>
-          </a:prstGeom>
-        </p:spPr>
-        <p:txBody>
-          <a:bodyPr wrap="none">
-            <a:spAutoFit/>
-          </a:bodyPr>
-          <a:lstStyle/>
-          <a:p/>
-        </p:txBody>
-      </p:sp>
-      <p:pic>
-        <p:nvPicPr>
-          <p:cNvPr id="10" name="Рисунок 9">
-            <a:extLst>
-              <a:ext uri="{FF2B5EF4-FFF2-40B4-BE49-F238E27FC236}">
-                <a16:creationId xmlns:a16="http://schemas.microsoft.com/office/drawing/2014/main" xmlns="" id="{C99A2A38-59F6-6169-1EBD-E833CF9D3EE5}"/>
-              </a:ext>
-            </a:extLst>
-          </p:cNvPr>
-          <p:cNvPicPr>
-            <a:picLocks noChangeAspect="1"/>
-          </p:cNvPicPr>
-          <p:nvPr/>
-        </p:nvPicPr>
-        <p:blipFill>
-          <a:blip r:embed="rId2" cstate="print">
-            <a:extLst>
-              <a:ext uri="{28A0092B-C50C-407E-A947-70E740481C1C}">
-                <a14:useLocalDpi xmlns:a14="http://schemas.microsoft.com/office/drawing/2010/main" val="0"/>
-              </a:ext>
-              <a:ext uri="{96DAC541-7B7A-43D3-8B79-37D633B846F1}">
-                <asvg:svgBlip xmlns:asvg="http://schemas.microsoft.com/office/drawing/2016/SVG/main" xmlns="" r:embed="rId3"/>
-              </a:ext>
-            </a:extLst>
-          </a:blip>
-          <a:stretch>
-            <a:fillRect/>
-          </a:stretch>
-        </p:blipFill>
-        <p:spPr>
-          <a:xfrm>
-            <a:off x="11676014" y="132450"/>
-            <a:ext cx="396564" cy="666750"/>
-          </a:xfrm>
-          <a:prstGeom prst="rect">
-            <a:avLst/>
-          </a:prstGeom>
-        </p:spPr>
-      </p:pic>
-      <p:sp>
-        <p:nvSpPr>
-          <p:cNvPr id="13" name="collective_page">
-            <a:extLst>
-              <a:ext uri="{FF2B5EF4-FFF2-40B4-BE49-F238E27FC236}">
-                <a16:creationId xmlns:a16="http://schemas.microsoft.com/office/drawing/2014/main" xmlns="" id="{F7A0EB90-9E0A-4AB0-9B6D-29A5E4576272}"/>
-              </a:ext>
-            </a:extLst>
-          </p:cNvPr>
-          <p:cNvSpPr txBox="1"/>
-          <p:nvPr/>
-        </p:nvSpPr>
-        <p:spPr>
-          <a:xfrm>
-            <a:off x="11638350" y="6305461"/>
-            <a:ext cx="437700" cy="433364"/>
-          </a:xfrm>
-          <a:prstGeom prst="rect">
-            <a:avLst/>
-          </a:prstGeom>
-          <a:noFill/>
-          <a:ln>
-            <a:noFill/>
-          </a:ln>
-        </p:spPr>
-        <p:txBody>
-          <a:bodyPr spcFirstLastPara="1" wrap="square" lIns="91425" tIns="45700" rIns="91425" bIns="45700" anchor="ctr" anchorCtr="0">
-            <a:noAutofit/>
-          </a:bodyPr>
-          <a:lstStyle/>
-          <a:p/>
-        </p:txBody>
-      </p:sp>
-    </p:spTree>
-    <p:extLst>
-      <p:ext uri="{BB962C8B-B14F-4D97-AF65-F5344CB8AC3E}">
-        <p14:creationId xmlns:p14="http://schemas.microsoft.com/office/powerpoint/2010/main" val="1460811332"/>
       </p:ext>
     </p:extLst>
   </p:cSld>
